--- a/output/wordlabs-manage-3day.pptx
+++ b/output/wordlabs-manage-3day.pptx
@@ -4240,7 +4240,7 @@
                 <a:ea typeface="Calibri" pitchFamily="34" charset="-122"/>
                 <a:cs typeface="Calibri" pitchFamily="34" charset="-120"/>
               </a:rPr>
-              <a:t>"control, handle, or direct"</a:t>
+              <a:t>"handle, control, direct"</a:t>
             </a:r>
             <a:endParaRPr lang="en-US" sz="2200" dirty="0"/>
           </a:p>
@@ -5288,7 +5288,7 @@
                 <a:ea typeface="Calibri" pitchFamily="34" charset="-122"/>
                 <a:cs typeface="Calibri" pitchFamily="34" charset="-120"/>
               </a:rPr>
-              <a:t>Word Labs  •  wordlabs.app  •  Root: 'manage' = control, handle, or direct</a:t>
+              <a:t>Word Labs  •  wordlabs.app  •  Root: 'manage' = handle, control, direct</a:t>
             </a:r>
             <a:endParaRPr lang="en-US" sz="800" dirty="0"/>
           </a:p>
@@ -5622,7 +5622,7 @@
                 <a:ea typeface="Trebuchet MS" pitchFamily="34" charset="-122"/>
                 <a:cs typeface="Trebuchet MS" pitchFamily="34" charset="-120"/>
               </a:rPr>
-              <a:t>0</a:t>
+              <a:t>1</a:t>
             </a:r>
             <a:pPr algn="ctr" indent="0" marL="0">
               <a:buNone/>
@@ -5928,7 +5928,7 @@
                 <a:ea typeface="Calibri" pitchFamily="34" charset="-122"/>
                 <a:cs typeface="Calibri" pitchFamily="34" charset="-120"/>
               </a:rPr>
-              <a:t>Word Labs  •  wordlabs.app  •  Root: 'manage' = control, handle, or direct</a:t>
+              <a:t>Word Labs  •  wordlabs.app  •  Root: 'manage' = handle, control, direct</a:t>
             </a:r>
             <a:endParaRPr lang="en-US" sz="800" dirty="0"/>
           </a:p>
@@ -6040,7 +6040,7 @@
                 <a:ea typeface="Calibri" pitchFamily="34" charset="-122"/>
                 <a:cs typeface="Calibri" pitchFamily="34" charset="-120"/>
               </a:rPr>
-              <a:t>The new </a:t>
+              <a:t>She showed great </a:t>
             </a:r>
             <a:pPr algn="l" indent="0" marL="0">
               <a:buNone/>
@@ -6057,7 +6057,7 @@
                 <a:ea typeface="Calibri" pitchFamily="34" charset="-122"/>
                 <a:cs typeface="Calibri" pitchFamily="34" charset="-120"/>
               </a:rPr>
-              <a:t>manager</a:t>
+              <a:t>management</a:t>
             </a:r>
             <a:pPr algn="l" indent="0" marL="0">
               <a:buNone/>
@@ -6071,7 +6071,7 @@
                 <a:ea typeface="Calibri" pitchFamily="34" charset="-122"/>
                 <a:cs typeface="Calibri" pitchFamily="34" charset="-120"/>
               </a:rPr>
-              <a:t> explained that good </a:t>
+              <a:t> skills, and her teacher said the project was very </a:t>
             </a:r>
             <a:pPr algn="l" indent="0" marL="0">
               <a:buNone/>
@@ -6088,7 +6088,7 @@
                 <a:ea typeface="Calibri" pitchFamily="34" charset="-122"/>
                 <a:cs typeface="Calibri" pitchFamily="34" charset="-120"/>
               </a:rPr>
-              <a:t>management</a:t>
+              <a:t>manageable</a:t>
             </a:r>
             <a:pPr algn="l" indent="0" marL="0">
               <a:buNone/>
@@ -6102,7 +6102,7 @@
                 <a:ea typeface="Calibri" pitchFamily="34" charset="-122"/>
                 <a:cs typeface="Calibri" pitchFamily="34" charset="-120"/>
               </a:rPr>
-              <a:t> would help the team succeed.</a:t>
+              <a:t>.</a:t>
             </a:r>
             <a:endParaRPr lang="en-US" sz="1800" dirty="0"/>
           </a:p>
@@ -6257,7 +6257,7 @@
                 <a:ea typeface="Trebuchet MS" pitchFamily="34" charset="-122"/>
                 <a:cs typeface="Trebuchet MS" pitchFamily="34" charset="-120"/>
               </a:rPr>
-              <a:t>manager</a:t>
+              <a:t>management</a:t>
             </a:r>
             <a:endParaRPr lang="en-US" sz="1400" dirty="0"/>
           </a:p>
@@ -6385,7 +6385,7 @@
                 <a:ea typeface="Trebuchet MS" pitchFamily="34" charset="-122"/>
                 <a:cs typeface="Trebuchet MS" pitchFamily="34" charset="-120"/>
               </a:rPr>
-              <a:t>management</a:t>
+              <a:t>manageable</a:t>
             </a:r>
             <a:endParaRPr lang="en-US" sz="1400" dirty="0"/>
           </a:p>
@@ -6716,7 +6716,7 @@
                 <a:ea typeface="Calibri" pitchFamily="34" charset="-122"/>
                 <a:cs typeface="Calibri" pitchFamily="34" charset="-120"/>
               </a:rPr>
-              <a:t>Word Labs  •  wordlabs.app  •  Root: 'manage' = control, handle, or direct</a:t>
+              <a:t>Word Labs  •  wordlabs.app  •  Root: 'manage' = handle, control, direct</a:t>
             </a:r>
             <a:endParaRPr lang="en-US" sz="800" dirty="0"/>
           </a:p>
@@ -6855,7 +6855,7 @@
                 <a:ea typeface="Trebuchet MS" pitchFamily="34" charset="-122"/>
                 <a:cs typeface="Trebuchet MS" pitchFamily="34" charset="-120"/>
               </a:rPr>
-              <a:t>manager</a:t>
+              <a:t>management</a:t>
             </a:r>
             <a:endParaRPr lang="en-US" sz="2800" dirty="0"/>
           </a:p>
@@ -7543,7 +7543,7 @@
                 <a:ea typeface="Calibri" pitchFamily="34" charset="-122"/>
                 <a:cs typeface="Calibri" pitchFamily="34" charset="-120"/>
               </a:rPr>
-              <a:t>Word Labs  •  wordlabs.app  •  Root: 'manage' = control, handle, or direct</a:t>
+              <a:t>Word Labs  •  wordlabs.app  •  Root: 'manage' = handle, control, direct</a:t>
             </a:r>
             <a:endParaRPr lang="en-US" sz="800" dirty="0"/>
           </a:p>
@@ -7682,7 +7682,7 @@
                 <a:ea typeface="Trebuchet MS" pitchFamily="34" charset="-122"/>
                 <a:cs typeface="Trebuchet MS" pitchFamily="34" charset="-120"/>
               </a:rPr>
-              <a:t>manager</a:t>
+              <a:t>management</a:t>
             </a:r>
             <a:endParaRPr lang="en-US" sz="2800" dirty="0"/>
           </a:p>
@@ -7860,7 +7860,7 @@
                 <a:ea typeface="Calibri" pitchFamily="34" charset="-122"/>
                 <a:cs typeface="Calibri" pitchFamily="34" charset="-120"/>
               </a:rPr>
-              <a:t>to handle or be in charge</a:t>
+              <a:t>to handle or control</a:t>
             </a:r>
             <a:endParaRPr lang="en-US" sz="850" dirty="0"/>
           </a:p>
@@ -7933,7 +7933,7 @@
                 <a:ea typeface="Trebuchet MS" pitchFamily="34" charset="-122"/>
                 <a:cs typeface="Trebuchet MS" pitchFamily="34" charset="-120"/>
               </a:rPr>
-              <a:t>er</a:t>
+              <a:t>ment</a:t>
             </a:r>
             <a:endParaRPr lang="en-US" sz="1300" dirty="0"/>
           </a:p>
@@ -7972,7 +7972,7 @@
                 <a:ea typeface="Calibri" pitchFamily="34" charset="-122"/>
                 <a:cs typeface="Calibri" pitchFamily="34" charset="-120"/>
               </a:rPr>
-              <a:t>a person who does something</a:t>
+              <a:t>the act or result of</a:t>
             </a:r>
             <a:endParaRPr lang="en-US" sz="850" dirty="0"/>
           </a:p>
@@ -8528,7 +8528,7 @@
                 <a:ea typeface="Calibri" pitchFamily="34" charset="-122"/>
                 <a:cs typeface="Calibri" pitchFamily="34" charset="-120"/>
               </a:rPr>
-              <a:t>Word Labs  •  wordlabs.app  •  Root: 'manage' = control, handle, or direct</a:t>
+              <a:t>Word Labs  •  wordlabs.app  •  Root: 'manage' = handle, control, direct</a:t>
             </a:r>
             <a:endParaRPr lang="en-US" sz="800" dirty="0"/>
           </a:p>
@@ -8667,7 +8667,7 @@
                 <a:ea typeface="Trebuchet MS" pitchFamily="34" charset="-122"/>
                 <a:cs typeface="Trebuchet MS" pitchFamily="34" charset="-120"/>
               </a:rPr>
-              <a:t>manager</a:t>
+              <a:t>management</a:t>
             </a:r>
             <a:endParaRPr lang="en-US" sz="2800" dirty="0"/>
           </a:p>
@@ -8845,7 +8845,7 @@
                 <a:ea typeface="Calibri" pitchFamily="34" charset="-122"/>
                 <a:cs typeface="Calibri" pitchFamily="34" charset="-120"/>
               </a:rPr>
-              <a:t>to handle or be in charge</a:t>
+              <a:t>to handle or control</a:t>
             </a:r>
             <a:endParaRPr lang="en-US" sz="850" dirty="0"/>
           </a:p>
@@ -8918,7 +8918,7 @@
                 <a:ea typeface="Trebuchet MS" pitchFamily="34" charset="-122"/>
                 <a:cs typeface="Trebuchet MS" pitchFamily="34" charset="-120"/>
               </a:rPr>
-              <a:t>er</a:t>
+              <a:t>ment</a:t>
             </a:r>
             <a:endParaRPr lang="en-US" sz="1300" dirty="0"/>
           </a:p>
@@ -8957,7 +8957,7 @@
                 <a:ea typeface="Calibri" pitchFamily="34" charset="-122"/>
                 <a:cs typeface="Calibri" pitchFamily="34" charset="-120"/>
               </a:rPr>
-              <a:t>a person who does something</a:t>
+              <a:t>the act or result of</a:t>
             </a:r>
             <a:endParaRPr lang="en-US" sz="850" dirty="0"/>
           </a:p>
@@ -9221,7 +9221,7 @@
                 <a:ea typeface="Trebuchet MS" pitchFamily="34" charset="-122"/>
                 <a:cs typeface="Trebuchet MS" pitchFamily="34" charset="-120"/>
               </a:rPr>
-              <a:t>ag</a:t>
+              <a:t>age</a:t>
             </a:r>
             <a:endParaRPr lang="en-US" sz="1400" dirty="0"/>
           </a:p>
@@ -9326,7 +9326,7 @@
                 <a:ea typeface="Trebuchet MS" pitchFamily="34" charset="-122"/>
                 <a:cs typeface="Trebuchet MS" pitchFamily="34" charset="-120"/>
               </a:rPr>
-              <a:t>er</a:t>
+              <a:t>ment</a:t>
             </a:r>
             <a:endParaRPr lang="en-US" sz="1400" dirty="0"/>
           </a:p>
@@ -9750,7 +9750,7 @@
                 <a:ea typeface="Calibri" pitchFamily="34" charset="-122"/>
                 <a:cs typeface="Calibri" pitchFamily="34" charset="-120"/>
               </a:rPr>
-              <a:t>Word Labs  •  wordlabs.app  •  Root: 'manage' = control, handle, or direct</a:t>
+              <a:t>Word Labs  •  wordlabs.app  •  Root: 'manage' = handle, control, direct</a:t>
             </a:r>
             <a:endParaRPr lang="en-US" sz="800" dirty="0"/>
           </a:p>
@@ -9889,7 +9889,7 @@
                 <a:ea typeface="Trebuchet MS" pitchFamily="34" charset="-122"/>
                 <a:cs typeface="Trebuchet MS" pitchFamily="34" charset="-120"/>
               </a:rPr>
-              <a:t>manager</a:t>
+              <a:t>management</a:t>
             </a:r>
             <a:endParaRPr lang="en-US" sz="2800" dirty="0"/>
           </a:p>
@@ -10067,7 +10067,7 @@
                 <a:ea typeface="Calibri" pitchFamily="34" charset="-122"/>
                 <a:cs typeface="Calibri" pitchFamily="34" charset="-120"/>
               </a:rPr>
-              <a:t>to handle or be in charge</a:t>
+              <a:t>to handle or control</a:t>
             </a:r>
             <a:endParaRPr lang="en-US" sz="850" dirty="0"/>
           </a:p>
@@ -10140,7 +10140,7 @@
                 <a:ea typeface="Trebuchet MS" pitchFamily="34" charset="-122"/>
                 <a:cs typeface="Trebuchet MS" pitchFamily="34" charset="-120"/>
               </a:rPr>
-              <a:t>er</a:t>
+              <a:t>ment</a:t>
             </a:r>
             <a:endParaRPr lang="en-US" sz="1300" dirty="0"/>
           </a:p>
@@ -10179,7 +10179,7 @@
                 <a:ea typeface="Calibri" pitchFamily="34" charset="-122"/>
                 <a:cs typeface="Calibri" pitchFamily="34" charset="-120"/>
               </a:rPr>
-              <a:t>a person who does something</a:t>
+              <a:t>the act or result of</a:t>
             </a:r>
             <a:endParaRPr lang="en-US" sz="850" dirty="0"/>
           </a:p>
@@ -10443,7 +10443,7 @@
                 <a:ea typeface="Trebuchet MS" pitchFamily="34" charset="-122"/>
                 <a:cs typeface="Trebuchet MS" pitchFamily="34" charset="-120"/>
               </a:rPr>
-              <a:t>ag</a:t>
+              <a:t>age</a:t>
             </a:r>
             <a:endParaRPr lang="en-US" sz="1400" dirty="0"/>
           </a:p>
@@ -10548,7 +10548,7 @@
                 <a:ea typeface="Trebuchet MS" pitchFamily="34" charset="-122"/>
                 <a:cs typeface="Trebuchet MS" pitchFamily="34" charset="-120"/>
               </a:rPr>
-              <a:t>er</a:t>
+              <a:t>ment</a:t>
             </a:r>
             <a:endParaRPr lang="en-US" sz="1400" dirty="0"/>
           </a:p>
@@ -10629,11 +10629,11 @@
         <p:spPr>
           <a:xfrm>
             <a:off x="1874520" y="4096512"/>
-            <a:ext cx="6903720" cy="658368"/>
+            <a:ext cx="6903720" cy="804672"/>
           </a:xfrm>
           <a:prstGeom prst="rect">
             <a:avLst>
-              <a:gd name="adj" fmla="val 8333"/>
+              <a:gd name="adj" fmla="val 6818"/>
             </a:avLst>
           </a:prstGeom>
           <a:solidFill>
@@ -10655,12 +10655,12 @@
         </p:nvSpPr>
         <p:spPr>
           <a:xfrm>
-            <a:off x="2427732" y="4169664"/>
-            <a:ext cx="685800" cy="475488"/>
+            <a:off x="1951330" y="4169664"/>
+            <a:ext cx="676656" cy="384048"/>
           </a:xfrm>
           <a:prstGeom prst="rect">
             <a:avLst>
-              <a:gd name="adj" fmla="val 7692"/>
+              <a:gd name="adj" fmla="val 9524"/>
             </a:avLst>
           </a:prstGeom>
           <a:solidFill>
@@ -10682,8 +10682,8 @@
         </p:nvSpPr>
         <p:spPr>
           <a:xfrm>
-            <a:off x="2427732" y="4169664"/>
-            <a:ext cx="685800" cy="475488"/>
+            <a:off x="1951330" y="4169664"/>
+            <a:ext cx="676656" cy="384048"/>
           </a:xfrm>
           <a:prstGeom prst="rect">
             <a:avLst/>
@@ -10721,12 +10721,12 @@
         </p:nvSpPr>
         <p:spPr>
           <a:xfrm>
-            <a:off x="3639312" y="4169664"/>
-            <a:ext cx="685800" cy="475488"/>
+            <a:off x="2677363" y="4169664"/>
+            <a:ext cx="676656" cy="384048"/>
           </a:xfrm>
           <a:prstGeom prst="rect">
             <a:avLst>
-              <a:gd name="adj" fmla="val 7692"/>
+              <a:gd name="adj" fmla="val 9524"/>
             </a:avLst>
           </a:prstGeom>
           <a:solidFill>
@@ -10748,8 +10748,8 @@
         </p:nvSpPr>
         <p:spPr>
           <a:xfrm>
-            <a:off x="3639312" y="4169664"/>
-            <a:ext cx="685800" cy="475488"/>
+            <a:off x="2677363" y="4169664"/>
+            <a:ext cx="676656" cy="384048"/>
           </a:xfrm>
           <a:prstGeom prst="rect">
             <a:avLst/>
@@ -10773,7 +10773,7 @@
                 <a:ea typeface="Trebuchet MS" pitchFamily="34" charset="-122"/>
                 <a:cs typeface="Trebuchet MS" pitchFamily="34" charset="-120"/>
               </a:rPr>
-              <a:t>an</a:t>
+              <a:t>a</a:t>
             </a:r>
             <a:endParaRPr lang="en-US" sz="900" dirty="0"/>
           </a:p>
@@ -10787,12 +10787,12 @@
         </p:nvSpPr>
         <p:spPr>
           <a:xfrm>
-            <a:off x="4850892" y="4169664"/>
-            <a:ext cx="685800" cy="475488"/>
+            <a:off x="3403397" y="4169664"/>
+            <a:ext cx="676656" cy="384048"/>
           </a:xfrm>
           <a:prstGeom prst="rect">
             <a:avLst>
-              <a:gd name="adj" fmla="val 7692"/>
+              <a:gd name="adj" fmla="val 9524"/>
             </a:avLst>
           </a:prstGeom>
           <a:solidFill>
@@ -10814,8 +10814,8 @@
         </p:nvSpPr>
         <p:spPr>
           <a:xfrm>
-            <a:off x="4850892" y="4169664"/>
-            <a:ext cx="685800" cy="475488"/>
+            <a:off x="3403397" y="4169664"/>
+            <a:ext cx="676656" cy="384048"/>
           </a:xfrm>
           <a:prstGeom prst="rect">
             <a:avLst/>
@@ -10839,7 +10839,7 @@
                 <a:ea typeface="Trebuchet MS" pitchFamily="34" charset="-122"/>
                 <a:cs typeface="Trebuchet MS" pitchFamily="34" charset="-120"/>
               </a:rPr>
-              <a:t>a</a:t>
+              <a:t>n</a:t>
             </a:r>
             <a:endParaRPr lang="en-US" sz="900" dirty="0"/>
           </a:p>
@@ -10853,12 +10853,12 @@
         </p:nvSpPr>
         <p:spPr>
           <a:xfrm>
-            <a:off x="6062472" y="4169664"/>
-            <a:ext cx="685800" cy="475488"/>
+            <a:off x="4129430" y="4169664"/>
+            <a:ext cx="676656" cy="384048"/>
           </a:xfrm>
           <a:prstGeom prst="rect">
             <a:avLst>
-              <a:gd name="adj" fmla="val 7692"/>
+              <a:gd name="adj" fmla="val 9524"/>
             </a:avLst>
           </a:prstGeom>
           <a:solidFill>
@@ -10880,8 +10880,8 @@
         </p:nvSpPr>
         <p:spPr>
           <a:xfrm>
-            <a:off x="6062472" y="4169664"/>
-            <a:ext cx="685800" cy="475488"/>
+            <a:off x="4129430" y="4169664"/>
+            <a:ext cx="676656" cy="384048"/>
           </a:xfrm>
           <a:prstGeom prst="rect">
             <a:avLst/>
@@ -10905,7 +10905,7 @@
                 <a:ea typeface="Trebuchet MS" pitchFamily="34" charset="-122"/>
                 <a:cs typeface="Trebuchet MS" pitchFamily="34" charset="-120"/>
               </a:rPr>
-              <a:t>g</a:t>
+              <a:t>a</a:t>
             </a:r>
             <a:endParaRPr lang="en-US" sz="900" dirty="0"/>
           </a:p>
@@ -10919,12 +10919,12 @@
         </p:nvSpPr>
         <p:spPr>
           <a:xfrm>
-            <a:off x="7274052" y="4169664"/>
-            <a:ext cx="685800" cy="475488"/>
+            <a:off x="4855464" y="4169664"/>
+            <a:ext cx="676656" cy="384048"/>
           </a:xfrm>
           <a:prstGeom prst="rect">
             <a:avLst>
-              <a:gd name="adj" fmla="val 7692"/>
+              <a:gd name="adj" fmla="val 9524"/>
             </a:avLst>
           </a:prstGeom>
           <a:solidFill>
@@ -10946,8 +10946,8 @@
         </p:nvSpPr>
         <p:spPr>
           <a:xfrm>
-            <a:off x="7274052" y="4169664"/>
-            <a:ext cx="685800" cy="475488"/>
+            <a:off x="4855464" y="4169664"/>
+            <a:ext cx="676656" cy="384048"/>
           </a:xfrm>
           <a:prstGeom prst="rect">
             <a:avLst/>
@@ -10971,7 +10971,310 @@
                 <a:ea typeface="Trebuchet MS" pitchFamily="34" charset="-122"/>
                 <a:cs typeface="Trebuchet MS" pitchFamily="34" charset="-120"/>
               </a:rPr>
-              <a:t>er</a:t>
+              <a:t>ge</a:t>
+            </a:r>
+            <a:endParaRPr lang="en-US" sz="900" dirty="0"/>
+          </a:p>
+        </p:txBody>
+      </p:sp>
+      <p:sp>
+        <p:nvSpPr>
+          <p:cNvPr id="46" name="Text 44"/>
+          <p:cNvSpPr/>
+          <p:nvPr/>
+        </p:nvSpPr>
+        <p:spPr>
+          <a:xfrm>
+            <a:off x="4855464" y="4572000"/>
+            <a:ext cx="676656" cy="219456"/>
+          </a:xfrm>
+          <a:prstGeom prst="rect">
+            <a:avLst/>
+          </a:prstGeom>
+          <a:noFill/>
+          <a:ln/>
+        </p:spPr>
+        <p:txBody>
+          <a:bodyPr wrap="square" lIns="0" tIns="0" rIns="0" bIns="0" rtlCol="0" anchor="t"/>
+          <a:lstStyle/>
+          <a:p>
+            <a:pPr algn="ctr" indent="0" marL="0">
+              <a:buNone/>
+            </a:pPr>
+            <a:r>
+              <a:rPr lang="en-US" sz="750" i="1" dirty="0">
+                <a:solidFill>
+                  <a:srgbClr val="94A3B8"/>
+                </a:solidFill>
+                <a:latin typeface="Calibri" pitchFamily="34" charset="0"/>
+                <a:ea typeface="Calibri" pitchFamily="34" charset="-122"/>
+                <a:cs typeface="Calibri" pitchFamily="34" charset="-120"/>
+              </a:rPr>
+              <a:t>/j/</a:t>
+            </a:r>
+            <a:endParaRPr lang="en-US" sz="750" dirty="0"/>
+          </a:p>
+        </p:txBody>
+      </p:sp>
+      <p:sp>
+        <p:nvSpPr>
+          <p:cNvPr id="47" name="Shape 45"/>
+          <p:cNvSpPr/>
+          <p:nvPr/>
+        </p:nvSpPr>
+        <p:spPr>
+          <a:xfrm>
+            <a:off x="5581498" y="4169664"/>
+            <a:ext cx="676656" cy="384048"/>
+          </a:xfrm>
+          <a:prstGeom prst="rect">
+            <a:avLst>
+              <a:gd name="adj" fmla="val 9524"/>
+            </a:avLst>
+          </a:prstGeom>
+          <a:solidFill>
+            <a:srgbClr val="FFFFFF"/>
+          </a:solidFill>
+          <a:ln w="12700">
+            <a:solidFill>
+              <a:srgbClr val="DB2777"/>
+            </a:solidFill>
+            <a:prstDash val="solid"/>
+          </a:ln>
+        </p:spPr>
+      </p:sp>
+      <p:sp>
+        <p:nvSpPr>
+          <p:cNvPr id="48" name="Text 46"/>
+          <p:cNvSpPr/>
+          <p:nvPr/>
+        </p:nvSpPr>
+        <p:spPr>
+          <a:xfrm>
+            <a:off x="5581498" y="4169664"/>
+            <a:ext cx="676656" cy="384048"/>
+          </a:xfrm>
+          <a:prstGeom prst="rect">
+            <a:avLst/>
+          </a:prstGeom>
+          <a:noFill/>
+          <a:ln/>
+        </p:spPr>
+        <p:txBody>
+          <a:bodyPr wrap="square" lIns="0" tIns="0" rIns="0" bIns="0" rtlCol="0" anchor="ctr"/>
+          <a:lstStyle/>
+          <a:p>
+            <a:pPr algn="ctr" indent="0" marL="0">
+              <a:buNone/>
+            </a:pPr>
+            <a:r>
+              <a:rPr lang="en-US" sz="900" b="1" dirty="0">
+                <a:solidFill>
+                  <a:srgbClr val="9D174D"/>
+                </a:solidFill>
+                <a:latin typeface="Trebuchet MS" pitchFamily="34" charset="0"/>
+                <a:ea typeface="Trebuchet MS" pitchFamily="34" charset="-122"/>
+                <a:cs typeface="Trebuchet MS" pitchFamily="34" charset="-120"/>
+              </a:rPr>
+              <a:t>m</a:t>
+            </a:r>
+            <a:endParaRPr lang="en-US" sz="900" dirty="0"/>
+          </a:p>
+        </p:txBody>
+      </p:sp>
+      <p:sp>
+        <p:nvSpPr>
+          <p:cNvPr id="49" name="Shape 47"/>
+          <p:cNvSpPr/>
+          <p:nvPr/>
+        </p:nvSpPr>
+        <p:spPr>
+          <a:xfrm>
+            <a:off x="6307531" y="4169664"/>
+            <a:ext cx="676656" cy="384048"/>
+          </a:xfrm>
+          <a:prstGeom prst="rect">
+            <a:avLst>
+              <a:gd name="adj" fmla="val 9524"/>
+            </a:avLst>
+          </a:prstGeom>
+          <a:solidFill>
+            <a:srgbClr val="FFFFFF"/>
+          </a:solidFill>
+          <a:ln w="12700">
+            <a:solidFill>
+              <a:srgbClr val="DB2777"/>
+            </a:solidFill>
+            <a:prstDash val="solid"/>
+          </a:ln>
+        </p:spPr>
+      </p:sp>
+      <p:sp>
+        <p:nvSpPr>
+          <p:cNvPr id="50" name="Text 48"/>
+          <p:cNvSpPr/>
+          <p:nvPr/>
+        </p:nvSpPr>
+        <p:spPr>
+          <a:xfrm>
+            <a:off x="6307531" y="4169664"/>
+            <a:ext cx="676656" cy="384048"/>
+          </a:xfrm>
+          <a:prstGeom prst="rect">
+            <a:avLst/>
+          </a:prstGeom>
+          <a:noFill/>
+          <a:ln/>
+        </p:spPr>
+        <p:txBody>
+          <a:bodyPr wrap="square" lIns="0" tIns="0" rIns="0" bIns="0" rtlCol="0" anchor="ctr"/>
+          <a:lstStyle/>
+          <a:p>
+            <a:pPr algn="ctr" indent="0" marL="0">
+              <a:buNone/>
+            </a:pPr>
+            <a:r>
+              <a:rPr lang="en-US" sz="900" b="1" dirty="0">
+                <a:solidFill>
+                  <a:srgbClr val="9D174D"/>
+                </a:solidFill>
+                <a:latin typeface="Trebuchet MS" pitchFamily="34" charset="0"/>
+                <a:ea typeface="Trebuchet MS" pitchFamily="34" charset="-122"/>
+                <a:cs typeface="Trebuchet MS" pitchFamily="34" charset="-120"/>
+              </a:rPr>
+              <a:t>e</a:t>
+            </a:r>
+            <a:endParaRPr lang="en-US" sz="900" dirty="0"/>
+          </a:p>
+        </p:txBody>
+      </p:sp>
+      <p:sp>
+        <p:nvSpPr>
+          <p:cNvPr id="51" name="Shape 49"/>
+          <p:cNvSpPr/>
+          <p:nvPr/>
+        </p:nvSpPr>
+        <p:spPr>
+          <a:xfrm>
+            <a:off x="7033565" y="4169664"/>
+            <a:ext cx="676656" cy="384048"/>
+          </a:xfrm>
+          <a:prstGeom prst="rect">
+            <a:avLst>
+              <a:gd name="adj" fmla="val 9524"/>
+            </a:avLst>
+          </a:prstGeom>
+          <a:solidFill>
+            <a:srgbClr val="FFFFFF"/>
+          </a:solidFill>
+          <a:ln w="12700">
+            <a:solidFill>
+              <a:srgbClr val="DB2777"/>
+            </a:solidFill>
+            <a:prstDash val="solid"/>
+          </a:ln>
+        </p:spPr>
+      </p:sp>
+      <p:sp>
+        <p:nvSpPr>
+          <p:cNvPr id="52" name="Text 50"/>
+          <p:cNvSpPr/>
+          <p:nvPr/>
+        </p:nvSpPr>
+        <p:spPr>
+          <a:xfrm>
+            <a:off x="7033565" y="4169664"/>
+            <a:ext cx="676656" cy="384048"/>
+          </a:xfrm>
+          <a:prstGeom prst="rect">
+            <a:avLst/>
+          </a:prstGeom>
+          <a:noFill/>
+          <a:ln/>
+        </p:spPr>
+        <p:txBody>
+          <a:bodyPr wrap="square" lIns="0" tIns="0" rIns="0" bIns="0" rtlCol="0" anchor="ctr"/>
+          <a:lstStyle/>
+          <a:p>
+            <a:pPr algn="ctr" indent="0" marL="0">
+              <a:buNone/>
+            </a:pPr>
+            <a:r>
+              <a:rPr lang="en-US" sz="900" b="1" dirty="0">
+                <a:solidFill>
+                  <a:srgbClr val="9D174D"/>
+                </a:solidFill>
+                <a:latin typeface="Trebuchet MS" pitchFamily="34" charset="0"/>
+                <a:ea typeface="Trebuchet MS" pitchFamily="34" charset="-122"/>
+                <a:cs typeface="Trebuchet MS" pitchFamily="34" charset="-120"/>
+              </a:rPr>
+              <a:t>n</a:t>
+            </a:r>
+            <a:endParaRPr lang="en-US" sz="900" dirty="0"/>
+          </a:p>
+        </p:txBody>
+      </p:sp>
+      <p:sp>
+        <p:nvSpPr>
+          <p:cNvPr id="53" name="Shape 51"/>
+          <p:cNvSpPr/>
+          <p:nvPr/>
+        </p:nvSpPr>
+        <p:spPr>
+          <a:xfrm>
+            <a:off x="7759598" y="4169664"/>
+            <a:ext cx="676656" cy="384048"/>
+          </a:xfrm>
+          <a:prstGeom prst="rect">
+            <a:avLst>
+              <a:gd name="adj" fmla="val 9524"/>
+            </a:avLst>
+          </a:prstGeom>
+          <a:solidFill>
+            <a:srgbClr val="FFFFFF"/>
+          </a:solidFill>
+          <a:ln w="12700">
+            <a:solidFill>
+              <a:srgbClr val="DB2777"/>
+            </a:solidFill>
+            <a:prstDash val="solid"/>
+          </a:ln>
+        </p:spPr>
+      </p:sp>
+      <p:sp>
+        <p:nvSpPr>
+          <p:cNvPr id="54" name="Text 52"/>
+          <p:cNvSpPr/>
+          <p:nvPr/>
+        </p:nvSpPr>
+        <p:spPr>
+          <a:xfrm>
+            <a:off x="7759598" y="4169664"/>
+            <a:ext cx="676656" cy="384048"/>
+          </a:xfrm>
+          <a:prstGeom prst="rect">
+            <a:avLst/>
+          </a:prstGeom>
+          <a:noFill/>
+          <a:ln/>
+        </p:spPr>
+        <p:txBody>
+          <a:bodyPr wrap="square" lIns="0" tIns="0" rIns="0" bIns="0" rtlCol="0" anchor="ctr"/>
+          <a:lstStyle/>
+          <a:p>
+            <a:pPr algn="ctr" indent="0" marL="0">
+              <a:buNone/>
+            </a:pPr>
+            <a:r>
+              <a:rPr lang="en-US" sz="900" b="1" dirty="0">
+                <a:solidFill>
+                  <a:srgbClr val="9D174D"/>
+                </a:solidFill>
+                <a:latin typeface="Trebuchet MS" pitchFamily="34" charset="0"/>
+                <a:ea typeface="Trebuchet MS" pitchFamily="34" charset="-122"/>
+                <a:cs typeface="Trebuchet MS" pitchFamily="34" charset="-120"/>
+              </a:rPr>
+              <a:t>t</a:t>
             </a:r>
             <a:endParaRPr lang="en-US" sz="900" dirty="0"/>
           </a:p>
@@ -11263,7 +11566,7 @@
                 <a:ea typeface="Calibri" pitchFamily="34" charset="-122"/>
                 <a:cs typeface="Calibri" pitchFamily="34" charset="-120"/>
               </a:rPr>
-              <a:t>Word Labs  •  wordlabs.app  •  Root: 'manage' = control, handle, or direct</a:t>
+              <a:t>Word Labs  •  wordlabs.app  •  Root: 'manage' = handle, control, direct</a:t>
             </a:r>
             <a:endParaRPr lang="en-US" sz="800" dirty="0"/>
           </a:p>
@@ -11402,7 +11705,7 @@
                 <a:ea typeface="Trebuchet MS" pitchFamily="34" charset="-122"/>
                 <a:cs typeface="Trebuchet MS" pitchFamily="34" charset="-120"/>
               </a:rPr>
-              <a:t>management</a:t>
+              <a:t>manageable</a:t>
             </a:r>
             <a:endParaRPr lang="en-US" sz="2800" dirty="0"/>
           </a:p>
@@ -12090,7 +12393,7 @@
                 <a:ea typeface="Calibri" pitchFamily="34" charset="-122"/>
                 <a:cs typeface="Calibri" pitchFamily="34" charset="-120"/>
               </a:rPr>
-              <a:t>Word Labs  •  wordlabs.app  •  Root: 'manage' = control, handle, or direct</a:t>
+              <a:t>Word Labs  •  wordlabs.app  •  Root: 'manage' = handle, control, direct</a:t>
             </a:r>
             <a:endParaRPr lang="en-US" sz="800" dirty="0"/>
           </a:p>
@@ -12229,7 +12532,7 @@
                 <a:ea typeface="Trebuchet MS" pitchFamily="34" charset="-122"/>
                 <a:cs typeface="Trebuchet MS" pitchFamily="34" charset="-120"/>
               </a:rPr>
-              <a:t>management</a:t>
+              <a:t>manageable</a:t>
             </a:r>
             <a:endParaRPr lang="en-US" sz="2800" dirty="0"/>
           </a:p>
@@ -12407,7 +12710,7 @@
                 <a:ea typeface="Calibri" pitchFamily="34" charset="-122"/>
                 <a:cs typeface="Calibri" pitchFamily="34" charset="-120"/>
               </a:rPr>
-              <a:t>to handle or be in charge</a:t>
+              <a:t>to handle or control</a:t>
             </a:r>
             <a:endParaRPr lang="en-US" sz="850" dirty="0"/>
           </a:p>
@@ -12480,7 +12783,7 @@
                 <a:ea typeface="Trebuchet MS" pitchFamily="34" charset="-122"/>
                 <a:cs typeface="Trebuchet MS" pitchFamily="34" charset="-120"/>
               </a:rPr>
-              <a:t>ment</a:t>
+              <a:t>able</a:t>
             </a:r>
             <a:endParaRPr lang="en-US" sz="1300" dirty="0"/>
           </a:p>
@@ -12519,7 +12822,7 @@
                 <a:ea typeface="Calibri" pitchFamily="34" charset="-122"/>
                 <a:cs typeface="Calibri" pitchFamily="34" charset="-120"/>
               </a:rPr>
-              <a:t>the act or result of something</a:t>
+              <a:t>able to be</a:t>
             </a:r>
             <a:endParaRPr lang="en-US" sz="850" dirty="0"/>
           </a:p>
@@ -13075,7 +13378,7 @@
                 <a:ea typeface="Calibri" pitchFamily="34" charset="-122"/>
                 <a:cs typeface="Calibri" pitchFamily="34" charset="-120"/>
               </a:rPr>
-              <a:t>Word Labs  •  wordlabs.app  •  Root: 'manage' = control, handle, or direct</a:t>
+              <a:t>Word Labs  •  wordlabs.app  •  Root: 'manage' = handle, control, direct</a:t>
             </a:r>
             <a:endParaRPr lang="en-US" sz="800" dirty="0"/>
           </a:p>
@@ -13214,7 +13517,7 @@
                 <a:ea typeface="Trebuchet MS" pitchFamily="34" charset="-122"/>
                 <a:cs typeface="Trebuchet MS" pitchFamily="34" charset="-120"/>
               </a:rPr>
-              <a:t>management</a:t>
+              <a:t>manageable</a:t>
             </a:r>
             <a:endParaRPr lang="en-US" sz="2800" dirty="0"/>
           </a:p>
@@ -13392,7 +13695,7 @@
                 <a:ea typeface="Calibri" pitchFamily="34" charset="-122"/>
                 <a:cs typeface="Calibri" pitchFamily="34" charset="-120"/>
               </a:rPr>
-              <a:t>to handle or be in charge</a:t>
+              <a:t>to handle or control</a:t>
             </a:r>
             <a:endParaRPr lang="en-US" sz="850" dirty="0"/>
           </a:p>
@@ -13465,7 +13768,7 @@
                 <a:ea typeface="Trebuchet MS" pitchFamily="34" charset="-122"/>
                 <a:cs typeface="Trebuchet MS" pitchFamily="34" charset="-120"/>
               </a:rPr>
-              <a:t>ment</a:t>
+              <a:t>able</a:t>
             </a:r>
             <a:endParaRPr lang="en-US" sz="1300" dirty="0"/>
           </a:p>
@@ -13504,7 +13807,7 @@
                 <a:ea typeface="Calibri" pitchFamily="34" charset="-122"/>
                 <a:cs typeface="Calibri" pitchFamily="34" charset="-120"/>
               </a:rPr>
-              <a:t>the act or result of something</a:t>
+              <a:t>able to be</a:t>
             </a:r>
             <a:endParaRPr lang="en-US" sz="850" dirty="0"/>
           </a:p>
@@ -13611,8 +13914,8 @@
         </p:nvSpPr>
         <p:spPr>
           <a:xfrm>
-            <a:off x="2313432" y="3364992"/>
-            <a:ext cx="1645920" cy="475488"/>
+            <a:off x="1975104" y="3364992"/>
+            <a:ext cx="1554480" cy="475488"/>
           </a:xfrm>
           <a:prstGeom prst="rect">
             <a:avLst>
@@ -13638,8 +13941,8 @@
         </p:nvSpPr>
         <p:spPr>
           <a:xfrm>
-            <a:off x="2313432" y="3364992"/>
-            <a:ext cx="1645920" cy="475488"/>
+            <a:off x="1975104" y="3364992"/>
+            <a:ext cx="1554480" cy="475488"/>
           </a:xfrm>
           <a:prstGeom prst="rect">
             <a:avLst/>
@@ -13677,8 +13980,8 @@
         </p:nvSpPr>
         <p:spPr>
           <a:xfrm>
-            <a:off x="3959352" y="3364992"/>
-            <a:ext cx="411480" cy="475488"/>
+            <a:off x="3529584" y="3364992"/>
+            <a:ext cx="73152" cy="475488"/>
           </a:xfrm>
           <a:prstGeom prst="rect">
             <a:avLst/>
@@ -13716,8 +14019,8 @@
         </p:nvSpPr>
         <p:spPr>
           <a:xfrm>
-            <a:off x="4370832" y="3364992"/>
-            <a:ext cx="1645920" cy="475488"/>
+            <a:off x="3602736" y="3364992"/>
+            <a:ext cx="1554480" cy="475488"/>
           </a:xfrm>
           <a:prstGeom prst="rect">
             <a:avLst>
@@ -13743,8 +14046,8 @@
         </p:nvSpPr>
         <p:spPr>
           <a:xfrm>
-            <a:off x="4370832" y="3364992"/>
-            <a:ext cx="1645920" cy="475488"/>
+            <a:off x="3602736" y="3364992"/>
+            <a:ext cx="1554480" cy="475488"/>
           </a:xfrm>
           <a:prstGeom prst="rect">
             <a:avLst/>
@@ -13782,8 +14085,8 @@
         </p:nvSpPr>
         <p:spPr>
           <a:xfrm>
-            <a:off x="6016752" y="3364992"/>
-            <a:ext cx="411480" cy="475488"/>
+            <a:off x="5157216" y="3364992"/>
+            <a:ext cx="73152" cy="475488"/>
           </a:xfrm>
           <a:prstGeom prst="rect">
             <a:avLst/>
@@ -13821,8 +14124,8 @@
         </p:nvSpPr>
         <p:spPr>
           <a:xfrm>
-            <a:off x="6428232" y="3364992"/>
-            <a:ext cx="1645920" cy="475488"/>
+            <a:off x="5230368" y="3364992"/>
+            <a:ext cx="1554480" cy="475488"/>
           </a:xfrm>
           <a:prstGeom prst="rect">
             <a:avLst>
@@ -13848,8 +14151,8 @@
         </p:nvSpPr>
         <p:spPr>
           <a:xfrm>
-            <a:off x="6428232" y="3364992"/>
-            <a:ext cx="1645920" cy="475488"/>
+            <a:off x="5230368" y="3364992"/>
+            <a:ext cx="1554480" cy="475488"/>
           </a:xfrm>
           <a:prstGeom prst="rect">
             <a:avLst/>
@@ -13873,7 +14176,7 @@
                 <a:ea typeface="Trebuchet MS" pitchFamily="34" charset="-122"/>
                 <a:cs typeface="Trebuchet MS" pitchFamily="34" charset="-120"/>
               </a:rPr>
-              <a:t>ment</a:t>
+              <a:t>a</a:t>
             </a:r>
             <a:endParaRPr lang="en-US" sz="1400" dirty="0"/>
           </a:p>
@@ -13881,7 +14184,112 @@
       </p:sp>
       <p:sp>
         <p:nvSpPr>
-          <p:cNvPr id="33" name="Shape 31"/>
+          <p:cNvPr id="33" name="Text 31"/>
+          <p:cNvSpPr/>
+          <p:nvPr/>
+        </p:nvSpPr>
+        <p:spPr>
+          <a:xfrm>
+            <a:off x="6784848" y="3364992"/>
+            <a:ext cx="73152" cy="475488"/>
+          </a:xfrm>
+          <a:prstGeom prst="rect">
+            <a:avLst/>
+          </a:prstGeom>
+          <a:noFill/>
+          <a:ln/>
+        </p:spPr>
+        <p:txBody>
+          <a:bodyPr wrap="square" lIns="0" tIns="0" rIns="0" bIns="0" rtlCol="0" anchor="ctr"/>
+          <a:lstStyle/>
+          <a:p>
+            <a:pPr algn="ctr" indent="0" marL="0">
+              <a:buNone/>
+            </a:pPr>
+            <a:r>
+              <a:rPr lang="en-US" sz="1600" b="1" dirty="0">
+                <a:solidFill>
+                  <a:srgbClr val="0D9488"/>
+                </a:solidFill>
+                <a:latin typeface="Trebuchet MS" pitchFamily="34" charset="0"/>
+                <a:ea typeface="Trebuchet MS" pitchFamily="34" charset="-122"/>
+                <a:cs typeface="Trebuchet MS" pitchFamily="34" charset="-120"/>
+              </a:rPr>
+              <a:t>·</a:t>
+            </a:r>
+            <a:endParaRPr lang="en-US" sz="1600" dirty="0"/>
+          </a:p>
+        </p:txBody>
+      </p:sp>
+      <p:sp>
+        <p:nvSpPr>
+          <p:cNvPr id="34" name="Shape 32"/>
+          <p:cNvSpPr/>
+          <p:nvPr/>
+        </p:nvSpPr>
+        <p:spPr>
+          <a:xfrm>
+            <a:off x="6858000" y="3364992"/>
+            <a:ext cx="1554480" cy="475488"/>
+          </a:xfrm>
+          <a:prstGeom prst="rect">
+            <a:avLst>
+              <a:gd name="adj" fmla="val 9615"/>
+            </a:avLst>
+          </a:prstGeom>
+          <a:solidFill>
+            <a:srgbClr val="FFFFFF"/>
+          </a:solidFill>
+          <a:ln w="12700">
+            <a:solidFill>
+              <a:srgbClr val="0D9488"/>
+            </a:solidFill>
+            <a:prstDash val="solid"/>
+          </a:ln>
+        </p:spPr>
+      </p:sp>
+      <p:sp>
+        <p:nvSpPr>
+          <p:cNvPr id="35" name="Text 33"/>
+          <p:cNvSpPr/>
+          <p:nvPr/>
+        </p:nvSpPr>
+        <p:spPr>
+          <a:xfrm>
+            <a:off x="6858000" y="3364992"/>
+            <a:ext cx="1554480" cy="475488"/>
+          </a:xfrm>
+          <a:prstGeom prst="rect">
+            <a:avLst/>
+          </a:prstGeom>
+          <a:noFill/>
+          <a:ln/>
+        </p:spPr>
+        <p:txBody>
+          <a:bodyPr wrap="square" lIns="0" tIns="0" rIns="0" bIns="0" rtlCol="0" anchor="ctr"/>
+          <a:lstStyle/>
+          <a:p>
+            <a:pPr algn="ctr" indent="0" marL="0">
+              <a:buNone/>
+            </a:pPr>
+            <a:r>
+              <a:rPr lang="en-US" sz="1400" b="1" dirty="0">
+                <a:solidFill>
+                  <a:srgbClr val="0D9488"/>
+                </a:solidFill>
+                <a:latin typeface="Trebuchet MS" pitchFamily="34" charset="0"/>
+                <a:ea typeface="Trebuchet MS" pitchFamily="34" charset="-122"/>
+                <a:cs typeface="Trebuchet MS" pitchFamily="34" charset="-120"/>
+              </a:rPr>
+              <a:t>ble</a:t>
+            </a:r>
+            <a:endParaRPr lang="en-US" sz="1400" dirty="0"/>
+          </a:p>
+        </p:txBody>
+      </p:sp>
+      <p:sp>
+        <p:nvSpPr>
+          <p:cNvPr id="36" name="Shape 34"/>
           <p:cNvSpPr/>
           <p:nvPr/>
         </p:nvSpPr>
@@ -13908,7 +14316,7 @@
       </p:sp>
       <p:sp>
         <p:nvSpPr>
-          <p:cNvPr id="34" name="Text 32"/>
+          <p:cNvPr id="37" name="Text 35"/>
           <p:cNvSpPr/>
           <p:nvPr/>
         </p:nvSpPr>
@@ -13947,7 +14355,7 @@
       </p:sp>
       <p:sp>
         <p:nvSpPr>
-          <p:cNvPr id="35" name="Shape 33"/>
+          <p:cNvPr id="38" name="Shape 36"/>
           <p:cNvSpPr/>
           <p:nvPr/>
         </p:nvSpPr>
@@ -13974,7 +14382,7 @@
       </p:sp>
       <p:sp>
         <p:nvSpPr>
-          <p:cNvPr id="36" name="Text 34"/>
+          <p:cNvPr id="39" name="Text 37"/>
           <p:cNvSpPr/>
           <p:nvPr/>
         </p:nvSpPr>
@@ -14206,7 +14614,7 @@
                 <a:ea typeface="Calibri" pitchFamily="34" charset="-122"/>
                 <a:cs typeface="Calibri" pitchFamily="34" charset="-120"/>
               </a:rPr>
-              <a:t>Root 'manage' — control, handle, or direct</a:t>
+              <a:t>Root 'manage' — handle, control, direct</a:t>
             </a:r>
             <a:endParaRPr lang="en-US" sz="1600" dirty="0"/>
           </a:p>
@@ -14562,7 +14970,7 @@
                 <a:ea typeface="Calibri" pitchFamily="34" charset="-122"/>
                 <a:cs typeface="Calibri" pitchFamily="34" charset="-120"/>
               </a:rPr>
-              <a:t>Word Labs  •  wordlabs.app  •  Root: 'manage' = control, handle, or direct</a:t>
+              <a:t>Word Labs  •  wordlabs.app  •  Root: 'manage' = handle, control, direct</a:t>
             </a:r>
             <a:endParaRPr lang="en-US" sz="800" dirty="0"/>
           </a:p>
@@ -14701,7 +15109,7 @@
                 <a:ea typeface="Trebuchet MS" pitchFamily="34" charset="-122"/>
                 <a:cs typeface="Trebuchet MS" pitchFamily="34" charset="-120"/>
               </a:rPr>
-              <a:t>management</a:t>
+              <a:t>manageable</a:t>
             </a:r>
             <a:endParaRPr lang="en-US" sz="2800" dirty="0"/>
           </a:p>
@@ -14879,7 +15287,7 @@
                 <a:ea typeface="Calibri" pitchFamily="34" charset="-122"/>
                 <a:cs typeface="Calibri" pitchFamily="34" charset="-120"/>
               </a:rPr>
-              <a:t>to handle or be in charge</a:t>
+              <a:t>to handle or control</a:t>
             </a:r>
             <a:endParaRPr lang="en-US" sz="850" dirty="0"/>
           </a:p>
@@ -14952,7 +15360,7 @@
                 <a:ea typeface="Trebuchet MS" pitchFamily="34" charset="-122"/>
                 <a:cs typeface="Trebuchet MS" pitchFamily="34" charset="-120"/>
               </a:rPr>
-              <a:t>ment</a:t>
+              <a:t>able</a:t>
             </a:r>
             <a:endParaRPr lang="en-US" sz="1300" dirty="0"/>
           </a:p>
@@ -14991,7 +15399,7 @@
                 <a:ea typeface="Calibri" pitchFamily="34" charset="-122"/>
                 <a:cs typeface="Calibri" pitchFamily="34" charset="-120"/>
               </a:rPr>
-              <a:t>the act or result of something</a:t>
+              <a:t>able to be</a:t>
             </a:r>
             <a:endParaRPr lang="en-US" sz="850" dirty="0"/>
           </a:p>
@@ -15098,8 +15506,8 @@
         </p:nvSpPr>
         <p:spPr>
           <a:xfrm>
-            <a:off x="2313432" y="3364992"/>
-            <a:ext cx="1645920" cy="475488"/>
+            <a:off x="1975104" y="3364992"/>
+            <a:ext cx="1554480" cy="475488"/>
           </a:xfrm>
           <a:prstGeom prst="rect">
             <a:avLst>
@@ -15125,8 +15533,8 @@
         </p:nvSpPr>
         <p:spPr>
           <a:xfrm>
-            <a:off x="2313432" y="3364992"/>
-            <a:ext cx="1645920" cy="475488"/>
+            <a:off x="1975104" y="3364992"/>
+            <a:ext cx="1554480" cy="475488"/>
           </a:xfrm>
           <a:prstGeom prst="rect">
             <a:avLst/>
@@ -15164,8 +15572,8 @@
         </p:nvSpPr>
         <p:spPr>
           <a:xfrm>
-            <a:off x="3959352" y="3364992"/>
-            <a:ext cx="411480" cy="475488"/>
+            <a:off x="3529584" y="3364992"/>
+            <a:ext cx="73152" cy="475488"/>
           </a:xfrm>
           <a:prstGeom prst="rect">
             <a:avLst/>
@@ -15203,8 +15611,8 @@
         </p:nvSpPr>
         <p:spPr>
           <a:xfrm>
-            <a:off x="4370832" y="3364992"/>
-            <a:ext cx="1645920" cy="475488"/>
+            <a:off x="3602736" y="3364992"/>
+            <a:ext cx="1554480" cy="475488"/>
           </a:xfrm>
           <a:prstGeom prst="rect">
             <a:avLst>
@@ -15230,8 +15638,8 @@
         </p:nvSpPr>
         <p:spPr>
           <a:xfrm>
-            <a:off x="4370832" y="3364992"/>
-            <a:ext cx="1645920" cy="475488"/>
+            <a:off x="3602736" y="3364992"/>
+            <a:ext cx="1554480" cy="475488"/>
           </a:xfrm>
           <a:prstGeom prst="rect">
             <a:avLst/>
@@ -15269,8 +15677,8 @@
         </p:nvSpPr>
         <p:spPr>
           <a:xfrm>
-            <a:off x="6016752" y="3364992"/>
-            <a:ext cx="411480" cy="475488"/>
+            <a:off x="5157216" y="3364992"/>
+            <a:ext cx="73152" cy="475488"/>
           </a:xfrm>
           <a:prstGeom prst="rect">
             <a:avLst/>
@@ -15308,8 +15716,8 @@
         </p:nvSpPr>
         <p:spPr>
           <a:xfrm>
-            <a:off x="6428232" y="3364992"/>
-            <a:ext cx="1645920" cy="475488"/>
+            <a:off x="5230368" y="3364992"/>
+            <a:ext cx="1554480" cy="475488"/>
           </a:xfrm>
           <a:prstGeom prst="rect">
             <a:avLst>
@@ -15335,8 +15743,8 @@
         </p:nvSpPr>
         <p:spPr>
           <a:xfrm>
-            <a:off x="6428232" y="3364992"/>
-            <a:ext cx="1645920" cy="475488"/>
+            <a:off x="5230368" y="3364992"/>
+            <a:ext cx="1554480" cy="475488"/>
           </a:xfrm>
           <a:prstGeom prst="rect">
             <a:avLst/>
@@ -15360,7 +15768,7 @@
                 <a:ea typeface="Trebuchet MS" pitchFamily="34" charset="-122"/>
                 <a:cs typeface="Trebuchet MS" pitchFamily="34" charset="-120"/>
               </a:rPr>
-              <a:t>ment</a:t>
+              <a:t>a</a:t>
             </a:r>
             <a:endParaRPr lang="en-US" sz="1400" dirty="0"/>
           </a:p>
@@ -15368,7 +15776,112 @@
       </p:sp>
       <p:sp>
         <p:nvSpPr>
-          <p:cNvPr id="33" name="Shape 31"/>
+          <p:cNvPr id="33" name="Text 31"/>
+          <p:cNvSpPr/>
+          <p:nvPr/>
+        </p:nvSpPr>
+        <p:spPr>
+          <a:xfrm>
+            <a:off x="6784848" y="3364992"/>
+            <a:ext cx="73152" cy="475488"/>
+          </a:xfrm>
+          <a:prstGeom prst="rect">
+            <a:avLst/>
+          </a:prstGeom>
+          <a:noFill/>
+          <a:ln/>
+        </p:spPr>
+        <p:txBody>
+          <a:bodyPr wrap="square" lIns="0" tIns="0" rIns="0" bIns="0" rtlCol="0" anchor="ctr"/>
+          <a:lstStyle/>
+          <a:p>
+            <a:pPr algn="ctr" indent="0" marL="0">
+              <a:buNone/>
+            </a:pPr>
+            <a:r>
+              <a:rPr lang="en-US" sz="1600" b="1" dirty="0">
+                <a:solidFill>
+                  <a:srgbClr val="0D9488"/>
+                </a:solidFill>
+                <a:latin typeface="Trebuchet MS" pitchFamily="34" charset="0"/>
+                <a:ea typeface="Trebuchet MS" pitchFamily="34" charset="-122"/>
+                <a:cs typeface="Trebuchet MS" pitchFamily="34" charset="-120"/>
+              </a:rPr>
+              <a:t>·</a:t>
+            </a:r>
+            <a:endParaRPr lang="en-US" sz="1600" dirty="0"/>
+          </a:p>
+        </p:txBody>
+      </p:sp>
+      <p:sp>
+        <p:nvSpPr>
+          <p:cNvPr id="34" name="Shape 32"/>
+          <p:cNvSpPr/>
+          <p:nvPr/>
+        </p:nvSpPr>
+        <p:spPr>
+          <a:xfrm>
+            <a:off x="6858000" y="3364992"/>
+            <a:ext cx="1554480" cy="475488"/>
+          </a:xfrm>
+          <a:prstGeom prst="rect">
+            <a:avLst>
+              <a:gd name="adj" fmla="val 9615"/>
+            </a:avLst>
+          </a:prstGeom>
+          <a:solidFill>
+            <a:srgbClr val="FFFFFF"/>
+          </a:solidFill>
+          <a:ln w="12700">
+            <a:solidFill>
+              <a:srgbClr val="0D9488"/>
+            </a:solidFill>
+            <a:prstDash val="solid"/>
+          </a:ln>
+        </p:spPr>
+      </p:sp>
+      <p:sp>
+        <p:nvSpPr>
+          <p:cNvPr id="35" name="Text 33"/>
+          <p:cNvSpPr/>
+          <p:nvPr/>
+        </p:nvSpPr>
+        <p:spPr>
+          <a:xfrm>
+            <a:off x="6858000" y="3364992"/>
+            <a:ext cx="1554480" cy="475488"/>
+          </a:xfrm>
+          <a:prstGeom prst="rect">
+            <a:avLst/>
+          </a:prstGeom>
+          <a:noFill/>
+          <a:ln/>
+        </p:spPr>
+        <p:txBody>
+          <a:bodyPr wrap="square" lIns="0" tIns="0" rIns="0" bIns="0" rtlCol="0" anchor="ctr"/>
+          <a:lstStyle/>
+          <a:p>
+            <a:pPr algn="ctr" indent="0" marL="0">
+              <a:buNone/>
+            </a:pPr>
+            <a:r>
+              <a:rPr lang="en-US" sz="1400" b="1" dirty="0">
+                <a:solidFill>
+                  <a:srgbClr val="0D9488"/>
+                </a:solidFill>
+                <a:latin typeface="Trebuchet MS" pitchFamily="34" charset="0"/>
+                <a:ea typeface="Trebuchet MS" pitchFamily="34" charset="-122"/>
+                <a:cs typeface="Trebuchet MS" pitchFamily="34" charset="-120"/>
+              </a:rPr>
+              <a:t>ble</a:t>
+            </a:r>
+            <a:endParaRPr lang="en-US" sz="1400" dirty="0"/>
+          </a:p>
+        </p:txBody>
+      </p:sp>
+      <p:sp>
+        <p:nvSpPr>
+          <p:cNvPr id="36" name="Shape 34"/>
           <p:cNvSpPr/>
           <p:nvPr/>
         </p:nvSpPr>
@@ -15395,7 +15908,7 @@
       </p:sp>
       <p:sp>
         <p:nvSpPr>
-          <p:cNvPr id="34" name="Text 32"/>
+          <p:cNvPr id="37" name="Text 35"/>
           <p:cNvSpPr/>
           <p:nvPr/>
         </p:nvSpPr>
@@ -15434,7 +15947,7 @@
       </p:sp>
       <p:sp>
         <p:nvSpPr>
-          <p:cNvPr id="35" name="Shape 33"/>
+          <p:cNvPr id="38" name="Shape 36"/>
           <p:cNvSpPr/>
           <p:nvPr/>
         </p:nvSpPr>
@@ -15461,7 +15974,7 @@
       </p:sp>
       <p:sp>
         <p:nvSpPr>
-          <p:cNvPr id="36" name="Shape 34"/>
+          <p:cNvPr id="39" name="Shape 37"/>
           <p:cNvSpPr/>
           <p:nvPr/>
         </p:nvSpPr>
@@ -15488,7 +16001,7 @@
       </p:sp>
       <p:sp>
         <p:nvSpPr>
-          <p:cNvPr id="37" name="Text 35"/>
+          <p:cNvPr id="40" name="Text 38"/>
           <p:cNvSpPr/>
           <p:nvPr/>
         </p:nvSpPr>
@@ -15527,7 +16040,7 @@
       </p:sp>
       <p:sp>
         <p:nvSpPr>
-          <p:cNvPr id="38" name="Shape 36"/>
+          <p:cNvPr id="41" name="Shape 39"/>
           <p:cNvSpPr/>
           <p:nvPr/>
         </p:nvSpPr>
@@ -15554,7 +16067,7 @@
       </p:sp>
       <p:sp>
         <p:nvSpPr>
-          <p:cNvPr id="39" name="Text 37"/>
+          <p:cNvPr id="42" name="Text 40"/>
           <p:cNvSpPr/>
           <p:nvPr/>
         </p:nvSpPr>
@@ -15585,7 +16098,7 @@
                 <a:ea typeface="Trebuchet MS" pitchFamily="34" charset="-122"/>
                 <a:cs typeface="Trebuchet MS" pitchFamily="34" charset="-120"/>
               </a:rPr>
-              <a:t>an</a:t>
+              <a:t>a</a:t>
             </a:r>
             <a:endParaRPr lang="en-US" sz="900" dirty="0"/>
           </a:p>
@@ -15593,7 +16106,7 @@
       </p:sp>
       <p:sp>
         <p:nvSpPr>
-          <p:cNvPr id="40" name="Shape 38"/>
+          <p:cNvPr id="43" name="Shape 41"/>
           <p:cNvSpPr/>
           <p:nvPr/>
         </p:nvSpPr>
@@ -15620,7 +16133,7 @@
       </p:sp>
       <p:sp>
         <p:nvSpPr>
-          <p:cNvPr id="41" name="Text 39"/>
+          <p:cNvPr id="44" name="Text 42"/>
           <p:cNvSpPr/>
           <p:nvPr/>
         </p:nvSpPr>
@@ -15651,7 +16164,7 @@
                 <a:ea typeface="Trebuchet MS" pitchFamily="34" charset="-122"/>
                 <a:cs typeface="Trebuchet MS" pitchFamily="34" charset="-120"/>
               </a:rPr>
-              <a:t>a</a:t>
+              <a:t>n</a:t>
             </a:r>
             <a:endParaRPr lang="en-US" sz="900" dirty="0"/>
           </a:p>
@@ -15659,7 +16172,7 @@
       </p:sp>
       <p:sp>
         <p:nvSpPr>
-          <p:cNvPr id="42" name="Shape 40"/>
+          <p:cNvPr id="45" name="Shape 43"/>
           <p:cNvSpPr/>
           <p:nvPr/>
         </p:nvSpPr>
@@ -15686,7 +16199,7 @@
       </p:sp>
       <p:sp>
         <p:nvSpPr>
-          <p:cNvPr id="43" name="Text 41"/>
+          <p:cNvPr id="46" name="Text 44"/>
           <p:cNvSpPr/>
           <p:nvPr/>
         </p:nvSpPr>
@@ -15717,6 +16230,72 @@
                 <a:ea typeface="Trebuchet MS" pitchFamily="34" charset="-122"/>
                 <a:cs typeface="Trebuchet MS" pitchFamily="34" charset="-120"/>
               </a:rPr>
+              <a:t>a</a:t>
+            </a:r>
+            <a:endParaRPr lang="en-US" sz="900" dirty="0"/>
+          </a:p>
+        </p:txBody>
+      </p:sp>
+      <p:sp>
+        <p:nvSpPr>
+          <p:cNvPr id="47" name="Shape 45"/>
+          <p:cNvSpPr/>
+          <p:nvPr/>
+        </p:nvSpPr>
+        <p:spPr>
+          <a:xfrm>
+            <a:off x="5254752" y="4169664"/>
+            <a:ext cx="685800" cy="384048"/>
+          </a:xfrm>
+          <a:prstGeom prst="rect">
+            <a:avLst>
+              <a:gd name="adj" fmla="val 9524"/>
+            </a:avLst>
+          </a:prstGeom>
+          <a:solidFill>
+            <a:srgbClr val="FFFFFF"/>
+          </a:solidFill>
+          <a:ln w="12700">
+            <a:solidFill>
+              <a:srgbClr val="DB2777"/>
+            </a:solidFill>
+            <a:prstDash val="solid"/>
+          </a:ln>
+        </p:spPr>
+      </p:sp>
+      <p:sp>
+        <p:nvSpPr>
+          <p:cNvPr id="48" name="Text 46"/>
+          <p:cNvSpPr/>
+          <p:nvPr/>
+        </p:nvSpPr>
+        <p:spPr>
+          <a:xfrm>
+            <a:off x="5254752" y="4169664"/>
+            <a:ext cx="685800" cy="384048"/>
+          </a:xfrm>
+          <a:prstGeom prst="rect">
+            <a:avLst/>
+          </a:prstGeom>
+          <a:noFill/>
+          <a:ln/>
+        </p:spPr>
+        <p:txBody>
+          <a:bodyPr wrap="square" lIns="0" tIns="0" rIns="0" bIns="0" rtlCol="0" anchor="ctr"/>
+          <a:lstStyle/>
+          <a:p>
+            <a:pPr algn="ctr" indent="0" marL="0">
+              <a:buNone/>
+            </a:pPr>
+            <a:r>
+              <a:rPr lang="en-US" sz="900" b="1" dirty="0">
+                <a:solidFill>
+                  <a:srgbClr val="9D174D"/>
+                </a:solidFill>
+                <a:latin typeface="Trebuchet MS" pitchFamily="34" charset="0"/>
+                <a:ea typeface="Trebuchet MS" pitchFamily="34" charset="-122"/>
+                <a:cs typeface="Trebuchet MS" pitchFamily="34" charset="-120"/>
+              </a:rPr>
               <a:t>ge</a:t>
             </a:r>
             <a:endParaRPr lang="en-US" sz="900" dirty="0"/>
@@ -15725,13 +16304,13 @@
       </p:sp>
       <p:sp>
         <p:nvSpPr>
-          <p:cNvPr id="44" name="Text 42"/>
-          <p:cNvSpPr/>
-          <p:nvPr/>
-        </p:nvSpPr>
-        <p:spPr>
-          <a:xfrm>
-            <a:off x="4447032" y="4572000"/>
+          <p:cNvPr id="49" name="Text 47"/>
+          <p:cNvSpPr/>
+          <p:nvPr/>
+        </p:nvSpPr>
+        <p:spPr>
+          <a:xfrm>
+            <a:off x="5254752" y="4572000"/>
             <a:ext cx="685800" cy="219456"/>
           </a:xfrm>
           <a:prstGeom prst="rect">
@@ -15764,13 +16343,13 @@
       </p:sp>
       <p:sp>
         <p:nvSpPr>
-          <p:cNvPr id="45" name="Shape 43"/>
-          <p:cNvSpPr/>
-          <p:nvPr/>
-        </p:nvSpPr>
-        <p:spPr>
-          <a:xfrm>
-            <a:off x="5254752" y="4169664"/>
+          <p:cNvPr id="50" name="Shape 48"/>
+          <p:cNvSpPr/>
+          <p:nvPr/>
+        </p:nvSpPr>
+        <p:spPr>
+          <a:xfrm>
+            <a:off x="6062472" y="4169664"/>
             <a:ext cx="685800" cy="384048"/>
           </a:xfrm>
           <a:prstGeom prst="rect">
@@ -15791,13 +16370,13 @@
       </p:sp>
       <p:sp>
         <p:nvSpPr>
-          <p:cNvPr id="46" name="Text 44"/>
-          <p:cNvSpPr/>
-          <p:nvPr/>
-        </p:nvSpPr>
-        <p:spPr>
-          <a:xfrm>
-            <a:off x="5254752" y="4169664"/>
+          <p:cNvPr id="51" name="Text 49"/>
+          <p:cNvSpPr/>
+          <p:nvPr/>
+        </p:nvSpPr>
+        <p:spPr>
+          <a:xfrm>
+            <a:off x="6062472" y="4169664"/>
             <a:ext cx="685800" cy="384048"/>
           </a:xfrm>
           <a:prstGeom prst="rect">
@@ -15822,7 +16401,7 @@
                 <a:ea typeface="Trebuchet MS" pitchFamily="34" charset="-122"/>
                 <a:cs typeface="Trebuchet MS" pitchFamily="34" charset="-120"/>
               </a:rPr>
-              <a:t>m</a:t>
+              <a:t>a</a:t>
             </a:r>
             <a:endParaRPr lang="en-US" sz="900" dirty="0"/>
           </a:p>
@@ -15830,13 +16409,13 @@
       </p:sp>
       <p:sp>
         <p:nvSpPr>
-          <p:cNvPr id="47" name="Shape 45"/>
-          <p:cNvSpPr/>
-          <p:nvPr/>
-        </p:nvSpPr>
-        <p:spPr>
-          <a:xfrm>
-            <a:off x="6062472" y="4169664"/>
+          <p:cNvPr id="52" name="Shape 50"/>
+          <p:cNvSpPr/>
+          <p:nvPr/>
+        </p:nvSpPr>
+        <p:spPr>
+          <a:xfrm>
+            <a:off x="6870192" y="4169664"/>
             <a:ext cx="685800" cy="384048"/>
           </a:xfrm>
           <a:prstGeom prst="rect">
@@ -15857,13 +16436,13 @@
       </p:sp>
       <p:sp>
         <p:nvSpPr>
-          <p:cNvPr id="48" name="Text 46"/>
-          <p:cNvSpPr/>
-          <p:nvPr/>
-        </p:nvSpPr>
-        <p:spPr>
-          <a:xfrm>
-            <a:off x="6062472" y="4169664"/>
+          <p:cNvPr id="53" name="Text 51"/>
+          <p:cNvSpPr/>
+          <p:nvPr/>
+        </p:nvSpPr>
+        <p:spPr>
+          <a:xfrm>
+            <a:off x="6870192" y="4169664"/>
             <a:ext cx="685800" cy="384048"/>
           </a:xfrm>
           <a:prstGeom prst="rect">
@@ -15888,7 +16467,7 @@
                 <a:ea typeface="Trebuchet MS" pitchFamily="34" charset="-122"/>
                 <a:cs typeface="Trebuchet MS" pitchFamily="34" charset="-120"/>
               </a:rPr>
-              <a:t>e</a:t>
+              <a:t>b</a:t>
             </a:r>
             <a:endParaRPr lang="en-US" sz="900" dirty="0"/>
           </a:p>
@@ -15896,13 +16475,13 @@
       </p:sp>
       <p:sp>
         <p:nvSpPr>
-          <p:cNvPr id="49" name="Shape 47"/>
-          <p:cNvSpPr/>
-          <p:nvPr/>
-        </p:nvSpPr>
-        <p:spPr>
-          <a:xfrm>
-            <a:off x="6870192" y="4169664"/>
+          <p:cNvPr id="54" name="Shape 52"/>
+          <p:cNvSpPr/>
+          <p:nvPr/>
+        </p:nvSpPr>
+        <p:spPr>
+          <a:xfrm>
+            <a:off x="7677912" y="4169664"/>
             <a:ext cx="685800" cy="384048"/>
           </a:xfrm>
           <a:prstGeom prst="rect">
@@ -15923,13 +16502,13 @@
       </p:sp>
       <p:sp>
         <p:nvSpPr>
-          <p:cNvPr id="50" name="Text 48"/>
-          <p:cNvSpPr/>
-          <p:nvPr/>
-        </p:nvSpPr>
-        <p:spPr>
-          <a:xfrm>
-            <a:off x="6870192" y="4169664"/>
+          <p:cNvPr id="55" name="Text 53"/>
+          <p:cNvSpPr/>
+          <p:nvPr/>
+        </p:nvSpPr>
+        <p:spPr>
+          <a:xfrm>
+            <a:off x="7677912" y="4169664"/>
             <a:ext cx="685800" cy="384048"/>
           </a:xfrm>
           <a:prstGeom prst="rect">
@@ -15954,73 +16533,7 @@
                 <a:ea typeface="Trebuchet MS" pitchFamily="34" charset="-122"/>
                 <a:cs typeface="Trebuchet MS" pitchFamily="34" charset="-120"/>
               </a:rPr>
-              <a:t>n</a:t>
-            </a:r>
-            <a:endParaRPr lang="en-US" sz="900" dirty="0"/>
-          </a:p>
-        </p:txBody>
-      </p:sp>
-      <p:sp>
-        <p:nvSpPr>
-          <p:cNvPr id="51" name="Shape 49"/>
-          <p:cNvSpPr/>
-          <p:nvPr/>
-        </p:nvSpPr>
-        <p:spPr>
-          <a:xfrm>
-            <a:off x="7677912" y="4169664"/>
-            <a:ext cx="685800" cy="384048"/>
-          </a:xfrm>
-          <a:prstGeom prst="rect">
-            <a:avLst>
-              <a:gd name="adj" fmla="val 9524"/>
-            </a:avLst>
-          </a:prstGeom>
-          <a:solidFill>
-            <a:srgbClr val="FFFFFF"/>
-          </a:solidFill>
-          <a:ln w="12700">
-            <a:solidFill>
-              <a:srgbClr val="DB2777"/>
-            </a:solidFill>
-            <a:prstDash val="solid"/>
-          </a:ln>
-        </p:spPr>
-      </p:sp>
-      <p:sp>
-        <p:nvSpPr>
-          <p:cNvPr id="52" name="Text 50"/>
-          <p:cNvSpPr/>
-          <p:nvPr/>
-        </p:nvSpPr>
-        <p:spPr>
-          <a:xfrm>
-            <a:off x="7677912" y="4169664"/>
-            <a:ext cx="685800" cy="384048"/>
-          </a:xfrm>
-          <a:prstGeom prst="rect">
-            <a:avLst/>
-          </a:prstGeom>
-          <a:noFill/>
-          <a:ln/>
-        </p:spPr>
-        <p:txBody>
-          <a:bodyPr wrap="square" lIns="0" tIns="0" rIns="0" bIns="0" rtlCol="0" anchor="ctr"/>
-          <a:lstStyle/>
-          <a:p>
-            <a:pPr algn="ctr" indent="0" marL="0">
-              <a:buNone/>
-            </a:pPr>
-            <a:r>
-              <a:rPr lang="en-US" sz="900" b="1" dirty="0">
-                <a:solidFill>
-                  <a:srgbClr val="9D174D"/>
-                </a:solidFill>
-                <a:latin typeface="Trebuchet MS" pitchFamily="34" charset="0"/>
-                <a:ea typeface="Trebuchet MS" pitchFamily="34" charset="-122"/>
-                <a:cs typeface="Trebuchet MS" pitchFamily="34" charset="-120"/>
-              </a:rPr>
-              <a:t>t</a:t>
+              <a:t>le</a:t>
             </a:r>
             <a:endParaRPr lang="en-US" sz="900" dirty="0"/>
           </a:p>
@@ -16594,7 +17107,7 @@
                 <a:ea typeface="Calibri" pitchFamily="34" charset="-122"/>
                 <a:cs typeface="Calibri" pitchFamily="34" charset="-120"/>
               </a:rPr>
-              <a:t>Word Labs  •  wordlabs.app  •  Root: 'manage' = control, handle, or direct</a:t>
+              <a:t>Word Labs  •  wordlabs.app  •  Root: 'manage' = handle, control, direct</a:t>
             </a:r>
             <a:endParaRPr lang="en-US" sz="800" dirty="0"/>
           </a:p>
@@ -17234,7 +17747,7 @@
                 <a:ea typeface="Calibri" pitchFamily="34" charset="-122"/>
                 <a:cs typeface="Calibri" pitchFamily="34" charset="-120"/>
               </a:rPr>
-              <a:t>Word Labs  •  wordlabs.app  •  Root: 'manage' = control, handle, or direct</a:t>
+              <a:t>Word Labs  •  wordlabs.app  •  Root: 'manage' = handle, control, direct</a:t>
             </a:r>
             <a:endParaRPr lang="en-US" sz="800" dirty="0"/>
           </a:p>
@@ -17346,7 +17859,7 @@
                 <a:ea typeface="Calibri" pitchFamily="34" charset="-122"/>
                 <a:cs typeface="Calibri" pitchFamily="34" charset="-120"/>
               </a:rPr>
-              <a:t>Although </a:t>
+              <a:t>The </a:t>
             </a:r>
             <a:pPr algn="l" indent="0" marL="0">
               <a:buNone/>
@@ -17377,7 +17890,7 @@
                 <a:ea typeface="Calibri" pitchFamily="34" charset="-122"/>
                 <a:cs typeface="Calibri" pitchFamily="34" charset="-120"/>
               </a:rPr>
-              <a:t> had caused problems, the new </a:t>
+              <a:t> of the event upset the </a:t>
             </a:r>
             <a:pPr algn="l" indent="0" marL="0">
               <a:buNone/>
@@ -17408,7 +17921,7 @@
                 <a:ea typeface="Calibri" pitchFamily="34" charset="-122"/>
                 <a:cs typeface="Calibri" pitchFamily="34" charset="-120"/>
               </a:rPr>
-              <a:t> believed the project was still </a:t>
+              <a:t>, but luckily the team was still </a:t>
             </a:r>
             <a:pPr algn="l" indent="0" marL="0">
               <a:buNone/>
@@ -17425,7 +17938,7 @@
                 <a:ea typeface="Calibri" pitchFamily="34" charset="-122"/>
                 <a:cs typeface="Calibri" pitchFamily="34" charset="-120"/>
               </a:rPr>
-              <a:t>manageable</a:t>
+              <a:t>managing</a:t>
             </a:r>
             <a:pPr algn="l" indent="0" marL="0">
               <a:buNone/>
@@ -17439,7 +17952,7 @@
                 <a:ea typeface="Calibri" pitchFamily="34" charset="-122"/>
                 <a:cs typeface="Calibri" pitchFamily="34" charset="-120"/>
               </a:rPr>
-              <a:t>.</a:t>
+              <a:t> well.</a:t>
             </a:r>
             <a:endParaRPr lang="en-US" sz="1800" dirty="0"/>
           </a:p>
@@ -17850,7 +18363,7 @@
                 <a:ea typeface="Trebuchet MS" pitchFamily="34" charset="-122"/>
                 <a:cs typeface="Trebuchet MS" pitchFamily="34" charset="-120"/>
               </a:rPr>
-              <a:t>manageable</a:t>
+              <a:t>managing</a:t>
             </a:r>
             <a:endParaRPr lang="en-US" sz="1400" dirty="0"/>
           </a:p>
@@ -18181,7 +18694,7 @@
                 <a:ea typeface="Calibri" pitchFamily="34" charset="-122"/>
                 <a:cs typeface="Calibri" pitchFamily="34" charset="-120"/>
               </a:rPr>
-              <a:t>Word Labs  •  wordlabs.app  •  Root: 'manage' = control, handle, or direct</a:t>
+              <a:t>Word Labs  •  wordlabs.app  •  Root: 'manage' = handle, control, direct</a:t>
             </a:r>
             <a:endParaRPr lang="en-US" sz="800" dirty="0"/>
           </a:p>
@@ -19008,7 +19521,7 @@
                 <a:ea typeface="Calibri" pitchFamily="34" charset="-122"/>
                 <a:cs typeface="Calibri" pitchFamily="34" charset="-120"/>
               </a:rPr>
-              <a:t>Word Labs  •  wordlabs.app  •  Root: 'manage' = control, handle, or direct</a:t>
+              <a:t>Word Labs  •  wordlabs.app  •  Root: 'manage' = handle, control, direct</a:t>
             </a:r>
             <a:endParaRPr lang="en-US" sz="800" dirty="0"/>
           </a:p>
@@ -19437,7 +19950,7 @@
                 <a:ea typeface="Calibri" pitchFamily="34" charset="-122"/>
                 <a:cs typeface="Calibri" pitchFamily="34" charset="-120"/>
               </a:rPr>
-              <a:t>to handle or be in charge</a:t>
+              <a:t>to handle or control</a:t>
             </a:r>
             <a:endParaRPr lang="en-US" sz="850" dirty="0"/>
           </a:p>
@@ -19549,7 +20062,7 @@
                 <a:ea typeface="Calibri" pitchFamily="34" charset="-122"/>
                 <a:cs typeface="Calibri" pitchFamily="34" charset="-120"/>
               </a:rPr>
-              <a:t>the act or result of something</a:t>
+              <a:t>the act or result of</a:t>
             </a:r>
             <a:endParaRPr lang="en-US" sz="850" dirty="0"/>
           </a:p>
@@ -20105,7 +20618,7 @@
                 <a:ea typeface="Calibri" pitchFamily="34" charset="-122"/>
                 <a:cs typeface="Calibri" pitchFamily="34" charset="-120"/>
               </a:rPr>
-              <a:t>Word Labs  •  wordlabs.app  •  Root: 'manage' = control, handle, or direct</a:t>
+              <a:t>Word Labs  •  wordlabs.app  •  Root: 'manage' = handle, control, direct</a:t>
             </a:r>
             <a:endParaRPr lang="en-US" sz="800" dirty="0"/>
           </a:p>
@@ -20534,7 +21047,7 @@
                 <a:ea typeface="Calibri" pitchFamily="34" charset="-122"/>
                 <a:cs typeface="Calibri" pitchFamily="34" charset="-120"/>
               </a:rPr>
-              <a:t>to handle or be in charge</a:t>
+              <a:t>to handle or control</a:t>
             </a:r>
             <a:endParaRPr lang="en-US" sz="850" dirty="0"/>
           </a:p>
@@ -20646,7 +21159,7 @@
                 <a:ea typeface="Calibri" pitchFamily="34" charset="-122"/>
                 <a:cs typeface="Calibri" pitchFamily="34" charset="-120"/>
               </a:rPr>
-              <a:t>the act or result of something</a:t>
+              <a:t>the act or result of</a:t>
             </a:r>
             <a:endParaRPr lang="en-US" sz="850" dirty="0"/>
           </a:p>
@@ -21544,7 +22057,7 @@
                 <a:ea typeface="Calibri" pitchFamily="34" charset="-122"/>
                 <a:cs typeface="Calibri" pitchFamily="34" charset="-120"/>
               </a:rPr>
-              <a:t>Word Labs  •  wordlabs.app  •  Root: 'manage' = control, handle, or direct</a:t>
+              <a:t>Word Labs  •  wordlabs.app  •  Root: 'manage' = handle, control, direct</a:t>
             </a:r>
             <a:endParaRPr lang="en-US" sz="800" dirty="0"/>
           </a:p>
@@ -21973,7 +22486,7 @@
                 <a:ea typeface="Calibri" pitchFamily="34" charset="-122"/>
                 <a:cs typeface="Calibri" pitchFamily="34" charset="-120"/>
               </a:rPr>
-              <a:t>to handle or be in charge</a:t>
+              <a:t>to handle or control</a:t>
             </a:r>
             <a:endParaRPr lang="en-US" sz="850" dirty="0"/>
           </a:p>
@@ -22085,7 +22598,7 @@
                 <a:ea typeface="Calibri" pitchFamily="34" charset="-122"/>
                 <a:cs typeface="Calibri" pitchFamily="34" charset="-120"/>
               </a:rPr>
-              <a:t>the act or result of something</a:t>
+              <a:t>the act or result of</a:t>
             </a:r>
             <a:endParaRPr lang="en-US" sz="850" dirty="0"/>
           </a:p>
@@ -22666,8 +23179,8 @@
         </p:nvSpPr>
         <p:spPr>
           <a:xfrm>
-            <a:off x="1952244" y="4169664"/>
-            <a:ext cx="543652" cy="384048"/>
+            <a:off x="1952596" y="4169664"/>
+            <a:ext cx="493776" cy="384048"/>
           </a:xfrm>
           <a:prstGeom prst="rect">
             <a:avLst>
@@ -22693,8 +23206,8 @@
         </p:nvSpPr>
         <p:spPr>
           <a:xfrm>
-            <a:off x="1952244" y="4169664"/>
-            <a:ext cx="543652" cy="384048"/>
+            <a:off x="1952596" y="4169664"/>
+            <a:ext cx="493776" cy="384048"/>
           </a:xfrm>
           <a:prstGeom prst="rect">
             <a:avLst/>
@@ -22732,8 +23245,8 @@
         </p:nvSpPr>
         <p:spPr>
           <a:xfrm>
-            <a:off x="2546188" y="4169664"/>
-            <a:ext cx="543652" cy="384048"/>
+            <a:off x="2497015" y="4169664"/>
+            <a:ext cx="493776" cy="384048"/>
           </a:xfrm>
           <a:prstGeom prst="rect">
             <a:avLst>
@@ -22759,8 +23272,8 @@
         </p:nvSpPr>
         <p:spPr>
           <a:xfrm>
-            <a:off x="2546188" y="4169664"/>
-            <a:ext cx="543652" cy="384048"/>
+            <a:off x="2497015" y="4169664"/>
+            <a:ext cx="493776" cy="384048"/>
           </a:xfrm>
           <a:prstGeom prst="rect">
             <a:avLst/>
@@ -22798,8 +23311,8 @@
         </p:nvSpPr>
         <p:spPr>
           <a:xfrm>
-            <a:off x="3140133" y="4169664"/>
-            <a:ext cx="543652" cy="384048"/>
+            <a:off x="3041435" y="4169664"/>
+            <a:ext cx="493776" cy="384048"/>
           </a:xfrm>
           <a:prstGeom prst="rect">
             <a:avLst>
@@ -22825,8 +23338,8 @@
         </p:nvSpPr>
         <p:spPr>
           <a:xfrm>
-            <a:off x="3140133" y="4169664"/>
-            <a:ext cx="543652" cy="384048"/>
+            <a:off x="3041435" y="4169664"/>
+            <a:ext cx="493776" cy="384048"/>
           </a:xfrm>
           <a:prstGeom prst="rect">
             <a:avLst/>
@@ -22864,8 +23377,8 @@
         </p:nvSpPr>
         <p:spPr>
           <a:xfrm>
-            <a:off x="3734077" y="4169664"/>
-            <a:ext cx="543652" cy="384048"/>
+            <a:off x="3585855" y="4169664"/>
+            <a:ext cx="493776" cy="384048"/>
           </a:xfrm>
           <a:prstGeom prst="rect">
             <a:avLst>
@@ -22891,8 +23404,8 @@
         </p:nvSpPr>
         <p:spPr>
           <a:xfrm>
-            <a:off x="3734077" y="4169664"/>
-            <a:ext cx="543652" cy="384048"/>
+            <a:off x="3585855" y="4169664"/>
+            <a:ext cx="493776" cy="384048"/>
           </a:xfrm>
           <a:prstGeom prst="rect">
             <a:avLst/>
@@ -22930,8 +23443,8 @@
         </p:nvSpPr>
         <p:spPr>
           <a:xfrm>
-            <a:off x="4328021" y="4169664"/>
-            <a:ext cx="543652" cy="384048"/>
+            <a:off x="4130274" y="4169664"/>
+            <a:ext cx="493776" cy="384048"/>
           </a:xfrm>
           <a:prstGeom prst="rect">
             <a:avLst>
@@ -22957,8 +23470,8 @@
         </p:nvSpPr>
         <p:spPr>
           <a:xfrm>
-            <a:off x="4328021" y="4169664"/>
-            <a:ext cx="543652" cy="384048"/>
+            <a:off x="4130274" y="4169664"/>
+            <a:ext cx="493776" cy="384048"/>
           </a:xfrm>
           <a:prstGeom prst="rect">
             <a:avLst/>
@@ -22982,7 +23495,7 @@
                 <a:ea typeface="Trebuchet MS" pitchFamily="34" charset="-122"/>
                 <a:cs typeface="Trebuchet MS" pitchFamily="34" charset="-120"/>
               </a:rPr>
-              <a:t>an</a:t>
+              <a:t>a</a:t>
             </a:r>
             <a:endParaRPr lang="en-US" sz="900" dirty="0"/>
           </a:p>
@@ -22996,8 +23509,8 @@
         </p:nvSpPr>
         <p:spPr>
           <a:xfrm>
-            <a:off x="4921966" y="4169664"/>
-            <a:ext cx="543652" cy="384048"/>
+            <a:off x="4674694" y="4169664"/>
+            <a:ext cx="493776" cy="384048"/>
           </a:xfrm>
           <a:prstGeom prst="rect">
             <a:avLst>
@@ -23023,8 +23536,8 @@
         </p:nvSpPr>
         <p:spPr>
           <a:xfrm>
-            <a:off x="4921966" y="4169664"/>
-            <a:ext cx="543652" cy="384048"/>
+            <a:off x="4674694" y="4169664"/>
+            <a:ext cx="493776" cy="384048"/>
           </a:xfrm>
           <a:prstGeom prst="rect">
             <a:avLst/>
@@ -23048,7 +23561,7 @@
                 <a:ea typeface="Trebuchet MS" pitchFamily="34" charset="-122"/>
                 <a:cs typeface="Trebuchet MS" pitchFamily="34" charset="-120"/>
               </a:rPr>
-              <a:t>a</a:t>
+              <a:t>n</a:t>
             </a:r>
             <a:endParaRPr lang="en-US" sz="900" dirty="0"/>
           </a:p>
@@ -23062,8 +23575,8 @@
         </p:nvSpPr>
         <p:spPr>
           <a:xfrm>
-            <a:off x="5515910" y="4169664"/>
-            <a:ext cx="543652" cy="384048"/>
+            <a:off x="5219114" y="4169664"/>
+            <a:ext cx="493776" cy="384048"/>
           </a:xfrm>
           <a:prstGeom prst="rect">
             <a:avLst>
@@ -23089,8 +23602,8 @@
         </p:nvSpPr>
         <p:spPr>
           <a:xfrm>
-            <a:off x="5515910" y="4169664"/>
-            <a:ext cx="543652" cy="384048"/>
+            <a:off x="5219114" y="4169664"/>
+            <a:ext cx="493776" cy="384048"/>
           </a:xfrm>
           <a:prstGeom prst="rect">
             <a:avLst/>
@@ -23114,6 +23627,72 @@
                 <a:ea typeface="Trebuchet MS" pitchFamily="34" charset="-122"/>
                 <a:cs typeface="Trebuchet MS" pitchFamily="34" charset="-120"/>
               </a:rPr>
+              <a:t>a</a:t>
+            </a:r>
+            <a:endParaRPr lang="en-US" sz="900" dirty="0"/>
+          </a:p>
+        </p:txBody>
+      </p:sp>
+      <p:sp>
+        <p:nvSpPr>
+          <p:cNvPr id="56" name="Shape 54"/>
+          <p:cNvSpPr/>
+          <p:nvPr/>
+        </p:nvSpPr>
+        <p:spPr>
+          <a:xfrm>
+            <a:off x="5763534" y="4169664"/>
+            <a:ext cx="493776" cy="384048"/>
+          </a:xfrm>
+          <a:prstGeom prst="rect">
+            <a:avLst>
+              <a:gd name="adj" fmla="val 9524"/>
+            </a:avLst>
+          </a:prstGeom>
+          <a:solidFill>
+            <a:srgbClr val="FFFFFF"/>
+          </a:solidFill>
+          <a:ln w="12700">
+            <a:solidFill>
+              <a:srgbClr val="DB2777"/>
+            </a:solidFill>
+            <a:prstDash val="solid"/>
+          </a:ln>
+        </p:spPr>
+      </p:sp>
+      <p:sp>
+        <p:nvSpPr>
+          <p:cNvPr id="57" name="Text 55"/>
+          <p:cNvSpPr/>
+          <p:nvPr/>
+        </p:nvSpPr>
+        <p:spPr>
+          <a:xfrm>
+            <a:off x="5763534" y="4169664"/>
+            <a:ext cx="493776" cy="384048"/>
+          </a:xfrm>
+          <a:prstGeom prst="rect">
+            <a:avLst/>
+          </a:prstGeom>
+          <a:noFill/>
+          <a:ln/>
+        </p:spPr>
+        <p:txBody>
+          <a:bodyPr wrap="square" lIns="0" tIns="0" rIns="0" bIns="0" rtlCol="0" anchor="ctr"/>
+          <a:lstStyle/>
+          <a:p>
+            <a:pPr algn="ctr" indent="0" marL="0">
+              <a:buNone/>
+            </a:pPr>
+            <a:r>
+              <a:rPr lang="en-US" sz="900" b="1" dirty="0">
+                <a:solidFill>
+                  <a:srgbClr val="9D174D"/>
+                </a:solidFill>
+                <a:latin typeface="Trebuchet MS" pitchFamily="34" charset="0"/>
+                <a:ea typeface="Trebuchet MS" pitchFamily="34" charset="-122"/>
+                <a:cs typeface="Trebuchet MS" pitchFamily="34" charset="-120"/>
+              </a:rPr>
               <a:t>ge</a:t>
             </a:r>
             <a:endParaRPr lang="en-US" sz="900" dirty="0"/>
@@ -23122,14 +23701,14 @@
       </p:sp>
       <p:sp>
         <p:nvSpPr>
-          <p:cNvPr id="56" name="Text 54"/>
-          <p:cNvSpPr/>
-          <p:nvPr/>
-        </p:nvSpPr>
-        <p:spPr>
-          <a:xfrm>
-            <a:off x="5515910" y="4572000"/>
-            <a:ext cx="543652" cy="219456"/>
+          <p:cNvPr id="58" name="Text 56"/>
+          <p:cNvSpPr/>
+          <p:nvPr/>
+        </p:nvSpPr>
+        <p:spPr>
+          <a:xfrm>
+            <a:off x="5763534" y="4572000"/>
+            <a:ext cx="493776" cy="219456"/>
           </a:xfrm>
           <a:prstGeom prst="rect">
             <a:avLst/>
@@ -23161,14 +23740,14 @@
       </p:sp>
       <p:sp>
         <p:nvSpPr>
-          <p:cNvPr id="57" name="Shape 55"/>
-          <p:cNvSpPr/>
-          <p:nvPr/>
-        </p:nvSpPr>
-        <p:spPr>
-          <a:xfrm>
-            <a:off x="6109855" y="4169664"/>
-            <a:ext cx="543652" cy="384048"/>
+          <p:cNvPr id="59" name="Shape 57"/>
+          <p:cNvSpPr/>
+          <p:nvPr/>
+        </p:nvSpPr>
+        <p:spPr>
+          <a:xfrm>
+            <a:off x="6307953" y="4169664"/>
+            <a:ext cx="493776" cy="384048"/>
           </a:xfrm>
           <a:prstGeom prst="rect">
             <a:avLst>
@@ -23188,14 +23767,14 @@
       </p:sp>
       <p:sp>
         <p:nvSpPr>
-          <p:cNvPr id="58" name="Text 56"/>
-          <p:cNvSpPr/>
-          <p:nvPr/>
-        </p:nvSpPr>
-        <p:spPr>
-          <a:xfrm>
-            <a:off x="6109855" y="4169664"/>
-            <a:ext cx="543652" cy="384048"/>
+          <p:cNvPr id="60" name="Text 58"/>
+          <p:cNvSpPr/>
+          <p:nvPr/>
+        </p:nvSpPr>
+        <p:spPr>
+          <a:xfrm>
+            <a:off x="6307953" y="4169664"/>
+            <a:ext cx="493776" cy="384048"/>
           </a:xfrm>
           <a:prstGeom prst="rect">
             <a:avLst/>
@@ -23227,14 +23806,14 @@
       </p:sp>
       <p:sp>
         <p:nvSpPr>
-          <p:cNvPr id="59" name="Shape 57"/>
-          <p:cNvSpPr/>
-          <p:nvPr/>
-        </p:nvSpPr>
-        <p:spPr>
-          <a:xfrm>
-            <a:off x="6703799" y="4169664"/>
-            <a:ext cx="543652" cy="384048"/>
+          <p:cNvPr id="61" name="Shape 59"/>
+          <p:cNvSpPr/>
+          <p:nvPr/>
+        </p:nvSpPr>
+        <p:spPr>
+          <a:xfrm>
+            <a:off x="6852373" y="4169664"/>
+            <a:ext cx="493776" cy="384048"/>
           </a:xfrm>
           <a:prstGeom prst="rect">
             <a:avLst>
@@ -23254,14 +23833,14 @@
       </p:sp>
       <p:sp>
         <p:nvSpPr>
-          <p:cNvPr id="60" name="Text 58"/>
-          <p:cNvSpPr/>
-          <p:nvPr/>
-        </p:nvSpPr>
-        <p:spPr>
-          <a:xfrm>
-            <a:off x="6703799" y="4169664"/>
-            <a:ext cx="543652" cy="384048"/>
+          <p:cNvPr id="62" name="Text 60"/>
+          <p:cNvSpPr/>
+          <p:nvPr/>
+        </p:nvSpPr>
+        <p:spPr>
+          <a:xfrm>
+            <a:off x="6852373" y="4169664"/>
+            <a:ext cx="493776" cy="384048"/>
           </a:xfrm>
           <a:prstGeom prst="rect">
             <a:avLst/>
@@ -23293,14 +23872,14 @@
       </p:sp>
       <p:sp>
         <p:nvSpPr>
-          <p:cNvPr id="61" name="Shape 59"/>
-          <p:cNvSpPr/>
-          <p:nvPr/>
-        </p:nvSpPr>
-        <p:spPr>
-          <a:xfrm>
-            <a:off x="7297743" y="4169664"/>
-            <a:ext cx="543652" cy="384048"/>
+          <p:cNvPr id="63" name="Shape 61"/>
+          <p:cNvSpPr/>
+          <p:nvPr/>
+        </p:nvSpPr>
+        <p:spPr>
+          <a:xfrm>
+            <a:off x="7396793" y="4169664"/>
+            <a:ext cx="493776" cy="384048"/>
           </a:xfrm>
           <a:prstGeom prst="rect">
             <a:avLst>
@@ -23320,14 +23899,14 @@
       </p:sp>
       <p:sp>
         <p:nvSpPr>
-          <p:cNvPr id="62" name="Text 60"/>
-          <p:cNvSpPr/>
-          <p:nvPr/>
-        </p:nvSpPr>
-        <p:spPr>
-          <a:xfrm>
-            <a:off x="7297743" y="4169664"/>
-            <a:ext cx="543652" cy="384048"/>
+          <p:cNvPr id="64" name="Text 62"/>
+          <p:cNvSpPr/>
+          <p:nvPr/>
+        </p:nvSpPr>
+        <p:spPr>
+          <a:xfrm>
+            <a:off x="7396793" y="4169664"/>
+            <a:ext cx="493776" cy="384048"/>
           </a:xfrm>
           <a:prstGeom prst="rect">
             <a:avLst/>
@@ -23359,14 +23938,14 @@
       </p:sp>
       <p:sp>
         <p:nvSpPr>
-          <p:cNvPr id="63" name="Shape 61"/>
-          <p:cNvSpPr/>
-          <p:nvPr/>
-        </p:nvSpPr>
-        <p:spPr>
-          <a:xfrm>
-            <a:off x="7891688" y="4169664"/>
-            <a:ext cx="543652" cy="384048"/>
+          <p:cNvPr id="65" name="Shape 63"/>
+          <p:cNvSpPr/>
+          <p:nvPr/>
+        </p:nvSpPr>
+        <p:spPr>
+          <a:xfrm>
+            <a:off x="7941212" y="4169664"/>
+            <a:ext cx="493776" cy="384048"/>
           </a:xfrm>
           <a:prstGeom prst="rect">
             <a:avLst>
@@ -23386,14 +23965,14 @@
       </p:sp>
       <p:sp>
         <p:nvSpPr>
-          <p:cNvPr id="64" name="Text 62"/>
-          <p:cNvSpPr/>
-          <p:nvPr/>
-        </p:nvSpPr>
-        <p:spPr>
-          <a:xfrm>
-            <a:off x="7891688" y="4169664"/>
-            <a:ext cx="543652" cy="384048"/>
+          <p:cNvPr id="66" name="Text 64"/>
+          <p:cNvSpPr/>
+          <p:nvPr/>
+        </p:nvSpPr>
+        <p:spPr>
+          <a:xfrm>
+            <a:off x="7941212" y="4169664"/>
+            <a:ext cx="493776" cy="384048"/>
           </a:xfrm>
           <a:prstGeom prst="rect">
             <a:avLst/>
@@ -23709,7 +24288,7 @@
                 <a:ea typeface="Calibri" pitchFamily="34" charset="-122"/>
                 <a:cs typeface="Calibri" pitchFamily="34" charset="-120"/>
               </a:rPr>
-              <a:t>Word Labs  •  wordlabs.app  •  Root: 'manage' = control, handle, or direct</a:t>
+              <a:t>Word Labs  •  wordlabs.app  •  Root: 'manage' = handle, control, direct</a:t>
             </a:r>
             <a:endParaRPr lang="en-US" sz="800" dirty="0"/>
           </a:p>
@@ -24536,7 +25115,7 @@
                 <a:ea typeface="Calibri" pitchFamily="34" charset="-122"/>
                 <a:cs typeface="Calibri" pitchFamily="34" charset="-120"/>
               </a:rPr>
-              <a:t>Word Labs  •  wordlabs.app  •  Root: 'manage' = control, handle, or direct</a:t>
+              <a:t>Word Labs  •  wordlabs.app  •  Root: 'manage' = handle, control, direct</a:t>
             </a:r>
             <a:endParaRPr lang="en-US" sz="800" dirty="0"/>
           </a:p>
@@ -24853,7 +25432,7 @@
                 <a:ea typeface="Calibri" pitchFamily="34" charset="-122"/>
                 <a:cs typeface="Calibri" pitchFamily="34" charset="-120"/>
               </a:rPr>
-              <a:t>to handle or be in charge</a:t>
+              <a:t>to handle or control</a:t>
             </a:r>
             <a:endParaRPr lang="en-US" sz="850" dirty="0"/>
           </a:p>
@@ -25521,7 +26100,7 @@
                 <a:ea typeface="Calibri" pitchFamily="34" charset="-122"/>
                 <a:cs typeface="Calibri" pitchFamily="34" charset="-120"/>
               </a:rPr>
-              <a:t>Word Labs  •  wordlabs.app  •  Root: 'manage' = control, handle, or direct</a:t>
+              <a:t>Word Labs  •  wordlabs.app  •  Root: 'manage' = handle, control, direct</a:t>
             </a:r>
             <a:endParaRPr lang="en-US" sz="800" dirty="0"/>
           </a:p>
@@ -25594,7 +26173,7 @@
                 <a:ea typeface="Trebuchet MS" pitchFamily="34" charset="-122"/>
                 <a:cs typeface="Trebuchet MS" pitchFamily="34" charset="-120"/>
               </a:rPr>
-              <a:t>We are learning that the root 'manage' means 'control, handle, or direct'.</a:t>
+              <a:t>We are learning that the root 'manage' means 'handle, control, direct'.</a:t>
             </a:r>
             <a:endParaRPr lang="en-US" sz="2000" dirty="0"/>
           </a:p>
@@ -26240,7 +26819,7 @@
                 <a:ea typeface="Calibri" pitchFamily="34" charset="-122"/>
                 <a:cs typeface="Calibri" pitchFamily="34" charset="-120"/>
               </a:rPr>
-              <a:t>Word Labs  •  wordlabs.app  •  Root: 'manage' = control, handle, or direct</a:t>
+              <a:t>Word Labs  •  wordlabs.app  •  Root: 'manage' = handle, control, direct</a:t>
             </a:r>
             <a:endParaRPr lang="en-US" sz="800" dirty="0"/>
           </a:p>
@@ -26557,7 +27136,7 @@
                 <a:ea typeface="Calibri" pitchFamily="34" charset="-122"/>
                 <a:cs typeface="Calibri" pitchFamily="34" charset="-120"/>
               </a:rPr>
-              <a:t>to handle or be in charge</a:t>
+              <a:t>to handle or control</a:t>
             </a:r>
             <a:endParaRPr lang="en-US" sz="850" dirty="0"/>
           </a:p>
@@ -27462,7 +28041,7 @@
                 <a:ea typeface="Calibri" pitchFamily="34" charset="-122"/>
                 <a:cs typeface="Calibri" pitchFamily="34" charset="-120"/>
               </a:rPr>
-              <a:t>Word Labs  •  wordlabs.app  •  Root: 'manage' = control, handle, or direct</a:t>
+              <a:t>Word Labs  •  wordlabs.app  •  Root: 'manage' = handle, control, direct</a:t>
             </a:r>
             <a:endParaRPr lang="en-US" sz="800" dirty="0"/>
           </a:p>
@@ -27779,7 +28358,7 @@
                 <a:ea typeface="Calibri" pitchFamily="34" charset="-122"/>
                 <a:cs typeface="Calibri" pitchFamily="34" charset="-120"/>
               </a:rPr>
-              <a:t>to handle or be in charge</a:t>
+              <a:t>to handle or control</a:t>
             </a:r>
             <a:endParaRPr lang="en-US" sz="850" dirty="0"/>
           </a:p>
@@ -28367,7 +28946,7 @@
         </p:nvSpPr>
         <p:spPr>
           <a:xfrm>
-            <a:off x="2427732" y="4169664"/>
+            <a:off x="2254649" y="4169664"/>
             <a:ext cx="685800" cy="475488"/>
           </a:xfrm>
           <a:prstGeom prst="rect">
@@ -28394,7 +28973,7 @@
         </p:nvSpPr>
         <p:spPr>
           <a:xfrm>
-            <a:off x="2427732" y="4169664"/>
+            <a:off x="2254649" y="4169664"/>
             <a:ext cx="685800" cy="475488"/>
           </a:xfrm>
           <a:prstGeom prst="rect">
@@ -28433,7 +29012,7 @@
         </p:nvSpPr>
         <p:spPr>
           <a:xfrm>
-            <a:off x="3639312" y="4169664"/>
+            <a:off x="3293146" y="4169664"/>
             <a:ext cx="685800" cy="475488"/>
           </a:xfrm>
           <a:prstGeom prst="rect">
@@ -28460,7 +29039,7 @@
         </p:nvSpPr>
         <p:spPr>
           <a:xfrm>
-            <a:off x="3639312" y="4169664"/>
+            <a:off x="3293146" y="4169664"/>
             <a:ext cx="685800" cy="475488"/>
           </a:xfrm>
           <a:prstGeom prst="rect">
@@ -28485,7 +29064,7 @@
                 <a:ea typeface="Trebuchet MS" pitchFamily="34" charset="-122"/>
                 <a:cs typeface="Trebuchet MS" pitchFamily="34" charset="-120"/>
               </a:rPr>
-              <a:t>an</a:t>
+              <a:t>a</a:t>
             </a:r>
             <a:endParaRPr lang="en-US" sz="900" dirty="0"/>
           </a:p>
@@ -28499,7 +29078,7 @@
         </p:nvSpPr>
         <p:spPr>
           <a:xfrm>
-            <a:off x="4850892" y="4169664"/>
+            <a:off x="4331643" y="4169664"/>
             <a:ext cx="685800" cy="475488"/>
           </a:xfrm>
           <a:prstGeom prst="rect">
@@ -28526,7 +29105,7 @@
         </p:nvSpPr>
         <p:spPr>
           <a:xfrm>
-            <a:off x="4850892" y="4169664"/>
+            <a:off x="4331643" y="4169664"/>
             <a:ext cx="685800" cy="475488"/>
           </a:xfrm>
           <a:prstGeom prst="rect">
@@ -28551,7 +29130,7 @@
                 <a:ea typeface="Trebuchet MS" pitchFamily="34" charset="-122"/>
                 <a:cs typeface="Trebuchet MS" pitchFamily="34" charset="-120"/>
               </a:rPr>
-              <a:t>a</a:t>
+              <a:t>n</a:t>
             </a:r>
             <a:endParaRPr lang="en-US" sz="900" dirty="0"/>
           </a:p>
@@ -28565,7 +29144,7 @@
         </p:nvSpPr>
         <p:spPr>
           <a:xfrm>
-            <a:off x="6062472" y="4169664"/>
+            <a:off x="5370141" y="4169664"/>
             <a:ext cx="685800" cy="475488"/>
           </a:xfrm>
           <a:prstGeom prst="rect">
@@ -28592,7 +29171,7 @@
         </p:nvSpPr>
         <p:spPr>
           <a:xfrm>
-            <a:off x="6062472" y="4169664"/>
+            <a:off x="5370141" y="4169664"/>
             <a:ext cx="685800" cy="475488"/>
           </a:xfrm>
           <a:prstGeom prst="rect">
@@ -28617,7 +29196,7 @@
                 <a:ea typeface="Trebuchet MS" pitchFamily="34" charset="-122"/>
                 <a:cs typeface="Trebuchet MS" pitchFamily="34" charset="-120"/>
               </a:rPr>
-              <a:t>g</a:t>
+              <a:t>a</a:t>
             </a:r>
             <a:endParaRPr lang="en-US" sz="900" dirty="0"/>
           </a:p>
@@ -28631,7 +29210,7 @@
         </p:nvSpPr>
         <p:spPr>
           <a:xfrm>
-            <a:off x="7274052" y="4169664"/>
+            <a:off x="6408638" y="4169664"/>
             <a:ext cx="685800" cy="475488"/>
           </a:xfrm>
           <a:prstGeom prst="rect">
@@ -28658,7 +29237,73 @@
         </p:nvSpPr>
         <p:spPr>
           <a:xfrm>
-            <a:off x="7274052" y="4169664"/>
+            <a:off x="6408638" y="4169664"/>
+            <a:ext cx="685800" cy="475488"/>
+          </a:xfrm>
+          <a:prstGeom prst="rect">
+            <a:avLst/>
+          </a:prstGeom>
+          <a:noFill/>
+          <a:ln/>
+        </p:spPr>
+        <p:txBody>
+          <a:bodyPr wrap="square" lIns="0" tIns="0" rIns="0" bIns="0" rtlCol="0" anchor="ctr"/>
+          <a:lstStyle/>
+          <a:p>
+            <a:pPr algn="ctr" indent="0" marL="0">
+              <a:buNone/>
+            </a:pPr>
+            <a:r>
+              <a:rPr lang="en-US" sz="900" b="1" dirty="0">
+                <a:solidFill>
+                  <a:srgbClr val="9D174D"/>
+                </a:solidFill>
+                <a:latin typeface="Trebuchet MS" pitchFamily="34" charset="0"/>
+                <a:ea typeface="Trebuchet MS" pitchFamily="34" charset="-122"/>
+                <a:cs typeface="Trebuchet MS" pitchFamily="34" charset="-120"/>
+              </a:rPr>
+              <a:t>g</a:t>
+            </a:r>
+            <a:endParaRPr lang="en-US" sz="900" dirty="0"/>
+          </a:p>
+        </p:txBody>
+      </p:sp>
+      <p:sp>
+        <p:nvSpPr>
+          <p:cNvPr id="46" name="Shape 44"/>
+          <p:cNvSpPr/>
+          <p:nvPr/>
+        </p:nvSpPr>
+        <p:spPr>
+          <a:xfrm>
+            <a:off x="7447135" y="4169664"/>
+            <a:ext cx="685800" cy="475488"/>
+          </a:xfrm>
+          <a:prstGeom prst="rect">
+            <a:avLst>
+              <a:gd name="adj" fmla="val 7692"/>
+            </a:avLst>
+          </a:prstGeom>
+          <a:solidFill>
+            <a:srgbClr val="FFFFFF"/>
+          </a:solidFill>
+          <a:ln w="12700">
+            <a:solidFill>
+              <a:srgbClr val="DB2777"/>
+            </a:solidFill>
+            <a:prstDash val="solid"/>
+          </a:ln>
+        </p:spPr>
+      </p:sp>
+      <p:sp>
+        <p:nvSpPr>
+          <p:cNvPr id="47" name="Text 45"/>
+          <p:cNvSpPr/>
+          <p:nvPr/>
+        </p:nvSpPr>
+        <p:spPr>
+          <a:xfrm>
+            <a:off x="7447135" y="4169664"/>
             <a:ext cx="685800" cy="475488"/>
           </a:xfrm>
           <a:prstGeom prst="rect">
@@ -28975,7 +29620,7 @@
                 <a:ea typeface="Calibri" pitchFamily="34" charset="-122"/>
                 <a:cs typeface="Calibri" pitchFamily="34" charset="-120"/>
               </a:rPr>
-              <a:t>Word Labs  •  wordlabs.app  •  Root: 'manage' = control, handle, or direct</a:t>
+              <a:t>Word Labs  •  wordlabs.app  •  Root: 'manage' = handle, control, direct</a:t>
             </a:r>
             <a:endParaRPr lang="en-US" sz="800" dirty="0"/>
           </a:p>
@@ -29114,7 +29759,7 @@
                 <a:ea typeface="Trebuchet MS" pitchFamily="34" charset="-122"/>
                 <a:cs typeface="Trebuchet MS" pitchFamily="34" charset="-120"/>
               </a:rPr>
-              <a:t>manageable</a:t>
+              <a:t>managing</a:t>
             </a:r>
             <a:endParaRPr lang="en-US" sz="2800" dirty="0"/>
           </a:p>
@@ -29802,7 +30447,7 @@
                 <a:ea typeface="Calibri" pitchFamily="34" charset="-122"/>
                 <a:cs typeface="Calibri" pitchFamily="34" charset="-120"/>
               </a:rPr>
-              <a:t>Word Labs  •  wordlabs.app  •  Root: 'manage' = control, handle, or direct</a:t>
+              <a:t>Word Labs  •  wordlabs.app  •  Root: 'manage' = handle, control, direct</a:t>
             </a:r>
             <a:endParaRPr lang="en-US" sz="800" dirty="0"/>
           </a:p>
@@ -29941,7 +30586,7 @@
                 <a:ea typeface="Trebuchet MS" pitchFamily="34" charset="-122"/>
                 <a:cs typeface="Trebuchet MS" pitchFamily="34" charset="-120"/>
               </a:rPr>
-              <a:t>manageable</a:t>
+              <a:t>managing</a:t>
             </a:r>
             <a:endParaRPr lang="en-US" sz="2800" dirty="0"/>
           </a:p>
@@ -30119,7 +30764,7 @@
                 <a:ea typeface="Calibri" pitchFamily="34" charset="-122"/>
                 <a:cs typeface="Calibri" pitchFamily="34" charset="-120"/>
               </a:rPr>
-              <a:t>to handle or be in charge</a:t>
+              <a:t>to handle or control</a:t>
             </a:r>
             <a:endParaRPr lang="en-US" sz="850" dirty="0"/>
           </a:p>
@@ -30192,7 +30837,7 @@
                 <a:ea typeface="Trebuchet MS" pitchFamily="34" charset="-122"/>
                 <a:cs typeface="Trebuchet MS" pitchFamily="34" charset="-120"/>
               </a:rPr>
-              <a:t>able</a:t>
+              <a:t>ing</a:t>
             </a:r>
             <a:endParaRPr lang="en-US" sz="1300" dirty="0"/>
           </a:p>
@@ -30231,7 +30876,7 @@
                 <a:ea typeface="Calibri" pitchFamily="34" charset="-122"/>
                 <a:cs typeface="Calibri" pitchFamily="34" charset="-120"/>
               </a:rPr>
-              <a:t>able to be done</a:t>
+              <a:t>doing it right now</a:t>
             </a:r>
             <a:endParaRPr lang="en-US" sz="850" dirty="0"/>
           </a:p>
@@ -30826,7 +31471,7 @@
                 <a:ea typeface="Calibri" pitchFamily="34" charset="-122"/>
                 <a:cs typeface="Calibri" pitchFamily="34" charset="-120"/>
               </a:rPr>
-              <a:t>Word Labs  •  wordlabs.app  •  Root: 'manage' = control, handle, or direct</a:t>
+              <a:t>Word Labs  •  wordlabs.app  •  Root: 'manage' = handle, control, direct</a:t>
             </a:r>
             <a:endParaRPr lang="en-US" sz="800" dirty="0"/>
           </a:p>
@@ -30965,7 +31610,7 @@
                 <a:ea typeface="Trebuchet MS" pitchFamily="34" charset="-122"/>
                 <a:cs typeface="Trebuchet MS" pitchFamily="34" charset="-120"/>
               </a:rPr>
-              <a:t>manageable</a:t>
+              <a:t>managing</a:t>
             </a:r>
             <a:endParaRPr lang="en-US" sz="2800" dirty="0"/>
           </a:p>
@@ -31143,7 +31788,7 @@
                 <a:ea typeface="Calibri" pitchFamily="34" charset="-122"/>
                 <a:cs typeface="Calibri" pitchFamily="34" charset="-120"/>
               </a:rPr>
-              <a:t>to handle or be in charge</a:t>
+              <a:t>to handle or control</a:t>
             </a:r>
             <a:endParaRPr lang="en-US" sz="850" dirty="0"/>
           </a:p>
@@ -31216,7 +31861,7 @@
                 <a:ea typeface="Trebuchet MS" pitchFamily="34" charset="-122"/>
                 <a:cs typeface="Trebuchet MS" pitchFamily="34" charset="-120"/>
               </a:rPr>
-              <a:t>able</a:t>
+              <a:t>ing</a:t>
             </a:r>
             <a:endParaRPr lang="en-US" sz="1300" dirty="0"/>
           </a:p>
@@ -31255,7 +31900,7 @@
                 <a:ea typeface="Calibri" pitchFamily="34" charset="-122"/>
                 <a:cs typeface="Calibri" pitchFamily="34" charset="-120"/>
               </a:rPr>
-              <a:t>able to be done</a:t>
+              <a:t>doing it right now</a:t>
             </a:r>
             <a:endParaRPr lang="en-US" sz="850" dirty="0"/>
           </a:p>
@@ -31401,8 +32046,8 @@
         </p:nvSpPr>
         <p:spPr>
           <a:xfrm>
-            <a:off x="1975104" y="3364992"/>
-            <a:ext cx="1554480" cy="475488"/>
+            <a:off x="2313432" y="3364992"/>
+            <a:ext cx="1645920" cy="475488"/>
           </a:xfrm>
           <a:prstGeom prst="rect">
             <a:avLst>
@@ -31428,8 +32073,8 @@
         </p:nvSpPr>
         <p:spPr>
           <a:xfrm>
-            <a:off x="1975104" y="3364992"/>
-            <a:ext cx="1554480" cy="475488"/>
+            <a:off x="2313432" y="3364992"/>
+            <a:ext cx="1645920" cy="475488"/>
           </a:xfrm>
           <a:prstGeom prst="rect">
             <a:avLst/>
@@ -31467,8 +32112,8 @@
         </p:nvSpPr>
         <p:spPr>
           <a:xfrm>
-            <a:off x="3529584" y="3364992"/>
-            <a:ext cx="73152" cy="475488"/>
+            <a:off x="3959352" y="3364992"/>
+            <a:ext cx="411480" cy="475488"/>
           </a:xfrm>
           <a:prstGeom prst="rect">
             <a:avLst/>
@@ -31506,8 +32151,8 @@
         </p:nvSpPr>
         <p:spPr>
           <a:xfrm>
-            <a:off x="3602736" y="3364992"/>
-            <a:ext cx="1554480" cy="475488"/>
+            <a:off x="4370832" y="3364992"/>
+            <a:ext cx="1645920" cy="475488"/>
           </a:xfrm>
           <a:prstGeom prst="rect">
             <a:avLst>
@@ -31533,8 +32178,8 @@
         </p:nvSpPr>
         <p:spPr>
           <a:xfrm>
-            <a:off x="3602736" y="3364992"/>
-            <a:ext cx="1554480" cy="475488"/>
+            <a:off x="4370832" y="3364992"/>
+            <a:ext cx="1645920" cy="475488"/>
           </a:xfrm>
           <a:prstGeom prst="rect">
             <a:avLst/>
@@ -31558,7 +32203,7 @@
                 <a:ea typeface="Trebuchet MS" pitchFamily="34" charset="-122"/>
                 <a:cs typeface="Trebuchet MS" pitchFamily="34" charset="-120"/>
               </a:rPr>
-              <a:t>age</a:t>
+              <a:t>ag</a:t>
             </a:r>
             <a:endParaRPr lang="en-US" sz="1400" dirty="0"/>
           </a:p>
@@ -31572,8 +32217,8 @@
         </p:nvSpPr>
         <p:spPr>
           <a:xfrm>
-            <a:off x="5157216" y="3364992"/>
-            <a:ext cx="73152" cy="475488"/>
+            <a:off x="6016752" y="3364992"/>
+            <a:ext cx="411480" cy="475488"/>
           </a:xfrm>
           <a:prstGeom prst="rect">
             <a:avLst/>
@@ -31611,8 +32256,8 @@
         </p:nvSpPr>
         <p:spPr>
           <a:xfrm>
-            <a:off x="5230368" y="3364992"/>
-            <a:ext cx="1554480" cy="475488"/>
+            <a:off x="6428232" y="3364992"/>
+            <a:ext cx="1645920" cy="475488"/>
           </a:xfrm>
           <a:prstGeom prst="rect">
             <a:avLst>
@@ -31638,8 +32283,8 @@
         </p:nvSpPr>
         <p:spPr>
           <a:xfrm>
-            <a:off x="5230368" y="3364992"/>
-            <a:ext cx="1554480" cy="475488"/>
+            <a:off x="6428232" y="3364992"/>
+            <a:ext cx="1645920" cy="475488"/>
           </a:xfrm>
           <a:prstGeom prst="rect">
             <a:avLst/>
@@ -31663,7 +32308,7 @@
                 <a:ea typeface="Trebuchet MS" pitchFamily="34" charset="-122"/>
                 <a:cs typeface="Trebuchet MS" pitchFamily="34" charset="-120"/>
               </a:rPr>
-              <a:t>a</a:t>
+              <a:t>ing</a:t>
             </a:r>
             <a:endParaRPr lang="en-US" sz="1400" dirty="0"/>
           </a:p>
@@ -31671,119 +32316,80 @@
       </p:sp>
       <p:sp>
         <p:nvSpPr>
-          <p:cNvPr id="34" name="Text 32"/>
-          <p:cNvSpPr/>
-          <p:nvPr/>
-        </p:nvSpPr>
-        <p:spPr>
-          <a:xfrm>
-            <a:off x="6784848" y="3364992"/>
-            <a:ext cx="73152" cy="475488"/>
-          </a:xfrm>
-          <a:prstGeom prst="rect">
-            <a:avLst/>
-          </a:prstGeom>
-          <a:noFill/>
-          <a:ln/>
-        </p:spPr>
-        <p:txBody>
-          <a:bodyPr wrap="square" lIns="0" tIns="0" rIns="0" bIns="0" rtlCol="0" anchor="ctr"/>
-          <a:lstStyle/>
-          <a:p>
-            <a:pPr algn="ctr" indent="0" marL="0">
-              <a:buNone/>
-            </a:pPr>
-            <a:r>
-              <a:rPr lang="en-US" sz="1600" b="1" dirty="0">
-                <a:solidFill>
-                  <a:srgbClr val="0D9488"/>
+          <p:cNvPr id="34" name="Shape 32"/>
+          <p:cNvSpPr/>
+          <p:nvPr/>
+        </p:nvSpPr>
+        <p:spPr>
+          <a:xfrm>
+            <a:off x="365760" y="4096512"/>
+            <a:ext cx="1371600" cy="804672"/>
+          </a:xfrm>
+          <a:prstGeom prst="rect">
+            <a:avLst>
+              <a:gd name="adj" fmla="val 6818"/>
+            </a:avLst>
+          </a:prstGeom>
+          <a:solidFill>
+            <a:srgbClr val="E2E8F0"/>
+          </a:solidFill>
+          <a:ln w="12700">
+            <a:solidFill>
+              <a:srgbClr val="E2E8F0"/>
+            </a:solidFill>
+            <a:prstDash val="solid"/>
+          </a:ln>
+        </p:spPr>
+      </p:sp>
+      <p:sp>
+        <p:nvSpPr>
+          <p:cNvPr id="35" name="Text 33"/>
+          <p:cNvSpPr/>
+          <p:nvPr/>
+        </p:nvSpPr>
+        <p:spPr>
+          <a:xfrm>
+            <a:off x="365760" y="4096512"/>
+            <a:ext cx="1371600" cy="804672"/>
+          </a:xfrm>
+          <a:prstGeom prst="rect">
+            <a:avLst/>
+          </a:prstGeom>
+          <a:noFill/>
+          <a:ln/>
+        </p:spPr>
+        <p:txBody>
+          <a:bodyPr wrap="square" lIns="0" tIns="0" rIns="0" bIns="0" rtlCol="0" anchor="ctr"/>
+          <a:lstStyle/>
+          <a:p>
+            <a:pPr algn="ctr" indent="0" marL="0">
+              <a:buNone/>
+            </a:pPr>
+            <a:r>
+              <a:rPr lang="en-US" sz="1100" b="1" dirty="0">
+                <a:solidFill>
+                  <a:srgbClr val="475569"/>
                 </a:solidFill>
                 <a:latin typeface="Trebuchet MS" pitchFamily="34" charset="0"/>
                 <a:ea typeface="Trebuchet MS" pitchFamily="34" charset="-122"/>
                 <a:cs typeface="Trebuchet MS" pitchFamily="34" charset="-120"/>
               </a:rPr>
-              <a:t>·</a:t>
-            </a:r>
-            <a:endParaRPr lang="en-US" sz="1600" dirty="0"/>
-          </a:p>
-        </p:txBody>
-      </p:sp>
-      <p:sp>
-        <p:nvSpPr>
-          <p:cNvPr id="35" name="Shape 33"/>
-          <p:cNvSpPr/>
-          <p:nvPr/>
-        </p:nvSpPr>
-        <p:spPr>
-          <a:xfrm>
-            <a:off x="6858000" y="3364992"/>
-            <a:ext cx="1554480" cy="475488"/>
-          </a:xfrm>
-          <a:prstGeom prst="rect">
-            <a:avLst>
-              <a:gd name="adj" fmla="val 9615"/>
-            </a:avLst>
-          </a:prstGeom>
-          <a:solidFill>
-            <a:srgbClr val="FFFFFF"/>
-          </a:solidFill>
-          <a:ln w="12700">
-            <a:solidFill>
-              <a:srgbClr val="0D9488"/>
-            </a:solidFill>
-            <a:prstDash val="solid"/>
-          </a:ln>
-        </p:spPr>
-      </p:sp>
-      <p:sp>
-        <p:nvSpPr>
-          <p:cNvPr id="36" name="Text 34"/>
-          <p:cNvSpPr/>
-          <p:nvPr/>
-        </p:nvSpPr>
-        <p:spPr>
-          <a:xfrm>
-            <a:off x="6858000" y="3364992"/>
-            <a:ext cx="1554480" cy="475488"/>
-          </a:xfrm>
-          <a:prstGeom prst="rect">
-            <a:avLst/>
-          </a:prstGeom>
-          <a:noFill/>
-          <a:ln/>
-        </p:spPr>
-        <p:txBody>
-          <a:bodyPr wrap="square" lIns="0" tIns="0" rIns="0" bIns="0" rtlCol="0" anchor="ctr"/>
-          <a:lstStyle/>
-          <a:p>
-            <a:pPr algn="ctr" indent="0" marL="0">
-              <a:buNone/>
-            </a:pPr>
-            <a:r>
-              <a:rPr lang="en-US" sz="1400" b="1" dirty="0">
-                <a:solidFill>
-                  <a:srgbClr val="0D9488"/>
-                </a:solidFill>
-                <a:latin typeface="Trebuchet MS" pitchFamily="34" charset="0"/>
-                <a:ea typeface="Trebuchet MS" pitchFamily="34" charset="-122"/>
-                <a:cs typeface="Trebuchet MS" pitchFamily="34" charset="-120"/>
-              </a:rPr>
-              <a:t>ble</a:t>
-            </a:r>
-            <a:endParaRPr lang="en-US" sz="1400" dirty="0"/>
-          </a:p>
-        </p:txBody>
-      </p:sp>
-      <p:sp>
-        <p:nvSpPr>
-          <p:cNvPr id="37" name="Shape 35"/>
-          <p:cNvSpPr/>
-          <p:nvPr/>
-        </p:nvSpPr>
-        <p:spPr>
-          <a:xfrm>
-            <a:off x="365760" y="4096512"/>
-            <a:ext cx="1371600" cy="804672"/>
+              <a:t>Phonemes</a:t>
+            </a:r>
+            <a:endParaRPr lang="en-US" sz="1100" dirty="0"/>
+          </a:p>
+        </p:txBody>
+      </p:sp>
+      <p:sp>
+        <p:nvSpPr>
+          <p:cNvPr id="36" name="Shape 34"/>
+          <p:cNvSpPr/>
+          <p:nvPr/>
+        </p:nvSpPr>
+        <p:spPr>
+          <a:xfrm>
+            <a:off x="1874520" y="4096512"/>
+            <a:ext cx="6903720" cy="804672"/>
           </a:xfrm>
           <a:prstGeom prst="rect">
             <a:avLst>
@@ -31791,85 +32397,19 @@
             </a:avLst>
           </a:prstGeom>
           <a:solidFill>
-            <a:srgbClr val="E2E8F0"/>
+            <a:srgbClr val="F8FAFC"/>
           </a:solidFill>
           <a:ln w="12700">
             <a:solidFill>
               <a:srgbClr val="E2E8F0"/>
             </a:solidFill>
-            <a:prstDash val="solid"/>
-          </a:ln>
-        </p:spPr>
-      </p:sp>
-      <p:sp>
-        <p:nvSpPr>
-          <p:cNvPr id="38" name="Text 36"/>
-          <p:cNvSpPr/>
-          <p:nvPr/>
-        </p:nvSpPr>
-        <p:spPr>
-          <a:xfrm>
-            <a:off x="365760" y="4096512"/>
-            <a:ext cx="1371600" cy="804672"/>
-          </a:xfrm>
-          <a:prstGeom prst="rect">
-            <a:avLst/>
-          </a:prstGeom>
-          <a:noFill/>
-          <a:ln/>
-        </p:spPr>
-        <p:txBody>
-          <a:bodyPr wrap="square" lIns="0" tIns="0" rIns="0" bIns="0" rtlCol="0" anchor="ctr"/>
-          <a:lstStyle/>
-          <a:p>
-            <a:pPr algn="ctr" indent="0" marL="0">
-              <a:buNone/>
-            </a:pPr>
-            <a:r>
-              <a:rPr lang="en-US" sz="1100" b="1" dirty="0">
-                <a:solidFill>
-                  <a:srgbClr val="475569"/>
-                </a:solidFill>
-                <a:latin typeface="Trebuchet MS" pitchFamily="34" charset="0"/>
-                <a:ea typeface="Trebuchet MS" pitchFamily="34" charset="-122"/>
-                <a:cs typeface="Trebuchet MS" pitchFamily="34" charset="-120"/>
-              </a:rPr>
-              <a:t>Phonemes</a:t>
-            </a:r>
-            <a:endParaRPr lang="en-US" sz="1100" dirty="0"/>
-          </a:p>
-        </p:txBody>
-      </p:sp>
-      <p:sp>
-        <p:nvSpPr>
-          <p:cNvPr id="39" name="Shape 37"/>
-          <p:cNvSpPr/>
-          <p:nvPr/>
-        </p:nvSpPr>
-        <p:spPr>
-          <a:xfrm>
-            <a:off x="1874520" y="4096512"/>
-            <a:ext cx="6903720" cy="804672"/>
-          </a:xfrm>
-          <a:prstGeom prst="rect">
-            <a:avLst>
-              <a:gd name="adj" fmla="val 6818"/>
-            </a:avLst>
-          </a:prstGeom>
-          <a:solidFill>
-            <a:srgbClr val="F8FAFC"/>
-          </a:solidFill>
-          <a:ln w="12700">
-            <a:solidFill>
-              <a:srgbClr val="E2E8F0"/>
-            </a:solidFill>
             <a:prstDash val="dash"/>
           </a:ln>
         </p:spPr>
       </p:sp>
       <p:sp>
         <p:nvSpPr>
-          <p:cNvPr id="40" name="Text 38"/>
+          <p:cNvPr id="37" name="Text 35"/>
           <p:cNvSpPr/>
           <p:nvPr/>
         </p:nvSpPr>
@@ -32192,7 +32732,7 @@
                 <a:ea typeface="Calibri" pitchFamily="34" charset="-122"/>
                 <a:cs typeface="Calibri" pitchFamily="34" charset="-120"/>
               </a:rPr>
-              <a:t>Word Labs  •  wordlabs.app  •  Root: 'manage' = control, handle, or direct</a:t>
+              <a:t>Word Labs  •  wordlabs.app  •  Root: 'manage' = handle, control, direct</a:t>
             </a:r>
             <a:endParaRPr lang="en-US" sz="800" dirty="0"/>
           </a:p>
@@ -32331,7 +32871,7 @@
                 <a:ea typeface="Trebuchet MS" pitchFamily="34" charset="-122"/>
                 <a:cs typeface="Trebuchet MS" pitchFamily="34" charset="-120"/>
               </a:rPr>
-              <a:t>manageable</a:t>
+              <a:t>managing</a:t>
             </a:r>
             <a:endParaRPr lang="en-US" sz="2800" dirty="0"/>
           </a:p>
@@ -32509,7 +33049,7 @@
                 <a:ea typeface="Calibri" pitchFamily="34" charset="-122"/>
                 <a:cs typeface="Calibri" pitchFamily="34" charset="-120"/>
               </a:rPr>
-              <a:t>to handle or be in charge</a:t>
+              <a:t>to handle or control</a:t>
             </a:r>
             <a:endParaRPr lang="en-US" sz="850" dirty="0"/>
           </a:p>
@@ -32582,7 +33122,7 @@
                 <a:ea typeface="Trebuchet MS" pitchFamily="34" charset="-122"/>
                 <a:cs typeface="Trebuchet MS" pitchFamily="34" charset="-120"/>
               </a:rPr>
-              <a:t>able</a:t>
+              <a:t>ing</a:t>
             </a:r>
             <a:endParaRPr lang="en-US" sz="1300" dirty="0"/>
           </a:p>
@@ -32621,7 +33161,7 @@
                 <a:ea typeface="Calibri" pitchFamily="34" charset="-122"/>
                 <a:cs typeface="Calibri" pitchFamily="34" charset="-120"/>
               </a:rPr>
-              <a:t>able to be done</a:t>
+              <a:t>doing it right now</a:t>
             </a:r>
             <a:endParaRPr lang="en-US" sz="850" dirty="0"/>
           </a:p>
@@ -32767,8 +33307,8 @@
         </p:nvSpPr>
         <p:spPr>
           <a:xfrm>
-            <a:off x="1975104" y="3364992"/>
-            <a:ext cx="1554480" cy="475488"/>
+            <a:off x="2313432" y="3364992"/>
+            <a:ext cx="1645920" cy="475488"/>
           </a:xfrm>
           <a:prstGeom prst="rect">
             <a:avLst>
@@ -32794,8 +33334,8 @@
         </p:nvSpPr>
         <p:spPr>
           <a:xfrm>
-            <a:off x="1975104" y="3364992"/>
-            <a:ext cx="1554480" cy="475488"/>
+            <a:off x="2313432" y="3364992"/>
+            <a:ext cx="1645920" cy="475488"/>
           </a:xfrm>
           <a:prstGeom prst="rect">
             <a:avLst/>
@@ -32833,8 +33373,8 @@
         </p:nvSpPr>
         <p:spPr>
           <a:xfrm>
-            <a:off x="3529584" y="3364992"/>
-            <a:ext cx="73152" cy="475488"/>
+            <a:off x="3959352" y="3364992"/>
+            <a:ext cx="411480" cy="475488"/>
           </a:xfrm>
           <a:prstGeom prst="rect">
             <a:avLst/>
@@ -32872,8 +33412,8 @@
         </p:nvSpPr>
         <p:spPr>
           <a:xfrm>
-            <a:off x="3602736" y="3364992"/>
-            <a:ext cx="1554480" cy="475488"/>
+            <a:off x="4370832" y="3364992"/>
+            <a:ext cx="1645920" cy="475488"/>
           </a:xfrm>
           <a:prstGeom prst="rect">
             <a:avLst>
@@ -32899,8 +33439,8 @@
         </p:nvSpPr>
         <p:spPr>
           <a:xfrm>
-            <a:off x="3602736" y="3364992"/>
-            <a:ext cx="1554480" cy="475488"/>
+            <a:off x="4370832" y="3364992"/>
+            <a:ext cx="1645920" cy="475488"/>
           </a:xfrm>
           <a:prstGeom prst="rect">
             <a:avLst/>
@@ -32924,7 +33464,7 @@
                 <a:ea typeface="Trebuchet MS" pitchFamily="34" charset="-122"/>
                 <a:cs typeface="Trebuchet MS" pitchFamily="34" charset="-120"/>
               </a:rPr>
-              <a:t>age</a:t>
+              <a:t>ag</a:t>
             </a:r>
             <a:endParaRPr lang="en-US" sz="1400" dirty="0"/>
           </a:p>
@@ -32938,8 +33478,8 @@
         </p:nvSpPr>
         <p:spPr>
           <a:xfrm>
-            <a:off x="5157216" y="3364992"/>
-            <a:ext cx="73152" cy="475488"/>
+            <a:off x="6016752" y="3364992"/>
+            <a:ext cx="411480" cy="475488"/>
           </a:xfrm>
           <a:prstGeom prst="rect">
             <a:avLst/>
@@ -32977,8 +33517,8 @@
         </p:nvSpPr>
         <p:spPr>
           <a:xfrm>
-            <a:off x="5230368" y="3364992"/>
-            <a:ext cx="1554480" cy="475488"/>
+            <a:off x="6428232" y="3364992"/>
+            <a:ext cx="1645920" cy="475488"/>
           </a:xfrm>
           <a:prstGeom prst="rect">
             <a:avLst>
@@ -33004,8 +33544,8 @@
         </p:nvSpPr>
         <p:spPr>
           <a:xfrm>
-            <a:off x="5230368" y="3364992"/>
-            <a:ext cx="1554480" cy="475488"/>
+            <a:off x="6428232" y="3364992"/>
+            <a:ext cx="1645920" cy="475488"/>
           </a:xfrm>
           <a:prstGeom prst="rect">
             <a:avLst/>
@@ -33029,7 +33569,7 @@
                 <a:ea typeface="Trebuchet MS" pitchFamily="34" charset="-122"/>
                 <a:cs typeface="Trebuchet MS" pitchFamily="34" charset="-120"/>
               </a:rPr>
-              <a:t>a</a:t>
+              <a:t>ing</a:t>
             </a:r>
             <a:endParaRPr lang="en-US" sz="1400" dirty="0"/>
           </a:p>
@@ -33037,193 +33577,247 @@
       </p:sp>
       <p:sp>
         <p:nvSpPr>
-          <p:cNvPr id="34" name="Text 32"/>
-          <p:cNvSpPr/>
-          <p:nvPr/>
-        </p:nvSpPr>
-        <p:spPr>
-          <a:xfrm>
-            <a:off x="6784848" y="3364992"/>
-            <a:ext cx="73152" cy="475488"/>
-          </a:xfrm>
-          <a:prstGeom prst="rect">
-            <a:avLst/>
-          </a:prstGeom>
-          <a:noFill/>
-          <a:ln/>
-        </p:spPr>
-        <p:txBody>
-          <a:bodyPr wrap="square" lIns="0" tIns="0" rIns="0" bIns="0" rtlCol="0" anchor="ctr"/>
-          <a:lstStyle/>
-          <a:p>
-            <a:pPr algn="ctr" indent="0" marL="0">
-              <a:buNone/>
-            </a:pPr>
-            <a:r>
-              <a:rPr lang="en-US" sz="1600" b="1" dirty="0">
-                <a:solidFill>
-                  <a:srgbClr val="0D9488"/>
+          <p:cNvPr id="34" name="Shape 32"/>
+          <p:cNvSpPr/>
+          <p:nvPr/>
+        </p:nvSpPr>
+        <p:spPr>
+          <a:xfrm>
+            <a:off x="365760" y="4096512"/>
+            <a:ext cx="1371600" cy="804672"/>
+          </a:xfrm>
+          <a:prstGeom prst="rect">
+            <a:avLst>
+              <a:gd name="adj" fmla="val 6818"/>
+            </a:avLst>
+          </a:prstGeom>
+          <a:solidFill>
+            <a:srgbClr val="E2E8F0"/>
+          </a:solidFill>
+          <a:ln w="12700">
+            <a:solidFill>
+              <a:srgbClr val="E2E8F0"/>
+            </a:solidFill>
+            <a:prstDash val="solid"/>
+          </a:ln>
+        </p:spPr>
+      </p:sp>
+      <p:sp>
+        <p:nvSpPr>
+          <p:cNvPr id="35" name="Text 33"/>
+          <p:cNvSpPr/>
+          <p:nvPr/>
+        </p:nvSpPr>
+        <p:spPr>
+          <a:xfrm>
+            <a:off x="365760" y="4096512"/>
+            <a:ext cx="1371600" cy="804672"/>
+          </a:xfrm>
+          <a:prstGeom prst="rect">
+            <a:avLst/>
+          </a:prstGeom>
+          <a:noFill/>
+          <a:ln/>
+        </p:spPr>
+        <p:txBody>
+          <a:bodyPr wrap="square" lIns="0" tIns="0" rIns="0" bIns="0" rtlCol="0" anchor="ctr"/>
+          <a:lstStyle/>
+          <a:p>
+            <a:pPr algn="ctr" indent="0" marL="0">
+              <a:buNone/>
+            </a:pPr>
+            <a:r>
+              <a:rPr lang="en-US" sz="1100" b="1" dirty="0">
+                <a:solidFill>
+                  <a:srgbClr val="475569"/>
                 </a:solidFill>
                 <a:latin typeface="Trebuchet MS" pitchFamily="34" charset="0"/>
                 <a:ea typeface="Trebuchet MS" pitchFamily="34" charset="-122"/>
                 <a:cs typeface="Trebuchet MS" pitchFamily="34" charset="-120"/>
               </a:rPr>
-              <a:t>·</a:t>
-            </a:r>
-            <a:endParaRPr lang="en-US" sz="1600" dirty="0"/>
-          </a:p>
-        </p:txBody>
-      </p:sp>
-      <p:sp>
-        <p:nvSpPr>
-          <p:cNvPr id="35" name="Shape 33"/>
-          <p:cNvSpPr/>
-          <p:nvPr/>
-        </p:nvSpPr>
-        <p:spPr>
-          <a:xfrm>
-            <a:off x="6858000" y="3364992"/>
-            <a:ext cx="1554480" cy="475488"/>
+              <a:t>Phonemes</a:t>
+            </a:r>
+            <a:endParaRPr lang="en-US" sz="1100" dirty="0"/>
+          </a:p>
+        </p:txBody>
+      </p:sp>
+      <p:sp>
+        <p:nvSpPr>
+          <p:cNvPr id="36" name="Shape 34"/>
+          <p:cNvSpPr/>
+          <p:nvPr/>
+        </p:nvSpPr>
+        <p:spPr>
+          <a:xfrm>
+            <a:off x="1874520" y="4096512"/>
+            <a:ext cx="6903720" cy="658368"/>
           </a:xfrm>
           <a:prstGeom prst="rect">
             <a:avLst>
-              <a:gd name="adj" fmla="val 9615"/>
+              <a:gd name="adj" fmla="val 8333"/>
             </a:avLst>
           </a:prstGeom>
           <a:solidFill>
+            <a:srgbClr val="FCE7F3"/>
+          </a:solidFill>
+          <a:ln w="12700">
+            <a:solidFill>
+              <a:srgbClr val="DB2777"/>
+            </a:solidFill>
+            <a:prstDash val="solid"/>
+          </a:ln>
+        </p:spPr>
+      </p:sp>
+      <p:sp>
+        <p:nvSpPr>
+          <p:cNvPr id="37" name="Shape 35"/>
+          <p:cNvSpPr/>
+          <p:nvPr/>
+        </p:nvSpPr>
+        <p:spPr>
+          <a:xfrm>
+            <a:off x="2124837" y="4169664"/>
+            <a:ext cx="685800" cy="475488"/>
+          </a:xfrm>
+          <a:prstGeom prst="rect">
+            <a:avLst>
+              <a:gd name="adj" fmla="val 7692"/>
+            </a:avLst>
+          </a:prstGeom>
+          <a:solidFill>
             <a:srgbClr val="FFFFFF"/>
           </a:solidFill>
           <a:ln w="12700">
             <a:solidFill>
-              <a:srgbClr val="0D9488"/>
-            </a:solidFill>
-            <a:prstDash val="solid"/>
-          </a:ln>
-        </p:spPr>
-      </p:sp>
-      <p:sp>
-        <p:nvSpPr>
-          <p:cNvPr id="36" name="Text 34"/>
-          <p:cNvSpPr/>
-          <p:nvPr/>
-        </p:nvSpPr>
-        <p:spPr>
-          <a:xfrm>
-            <a:off x="6858000" y="3364992"/>
-            <a:ext cx="1554480" cy="475488"/>
-          </a:xfrm>
-          <a:prstGeom prst="rect">
-            <a:avLst/>
-          </a:prstGeom>
-          <a:noFill/>
-          <a:ln/>
-        </p:spPr>
-        <p:txBody>
-          <a:bodyPr wrap="square" lIns="0" tIns="0" rIns="0" bIns="0" rtlCol="0" anchor="ctr"/>
-          <a:lstStyle/>
-          <a:p>
-            <a:pPr algn="ctr" indent="0" marL="0">
-              <a:buNone/>
-            </a:pPr>
-            <a:r>
-              <a:rPr lang="en-US" sz="1400" b="1" dirty="0">
-                <a:solidFill>
-                  <a:srgbClr val="0D9488"/>
+              <a:srgbClr val="DB2777"/>
+            </a:solidFill>
+            <a:prstDash val="solid"/>
+          </a:ln>
+        </p:spPr>
+      </p:sp>
+      <p:sp>
+        <p:nvSpPr>
+          <p:cNvPr id="38" name="Text 36"/>
+          <p:cNvSpPr/>
+          <p:nvPr/>
+        </p:nvSpPr>
+        <p:spPr>
+          <a:xfrm>
+            <a:off x="2124837" y="4169664"/>
+            <a:ext cx="685800" cy="475488"/>
+          </a:xfrm>
+          <a:prstGeom prst="rect">
+            <a:avLst/>
+          </a:prstGeom>
+          <a:noFill/>
+          <a:ln/>
+        </p:spPr>
+        <p:txBody>
+          <a:bodyPr wrap="square" lIns="0" tIns="0" rIns="0" bIns="0" rtlCol="0" anchor="ctr"/>
+          <a:lstStyle/>
+          <a:p>
+            <a:pPr algn="ctr" indent="0" marL="0">
+              <a:buNone/>
+            </a:pPr>
+            <a:r>
+              <a:rPr lang="en-US" sz="900" b="1" dirty="0">
+                <a:solidFill>
+                  <a:srgbClr val="9D174D"/>
                 </a:solidFill>
                 <a:latin typeface="Trebuchet MS" pitchFamily="34" charset="0"/>
                 <a:ea typeface="Trebuchet MS" pitchFamily="34" charset="-122"/>
                 <a:cs typeface="Trebuchet MS" pitchFamily="34" charset="-120"/>
               </a:rPr>
-              <a:t>ble</a:t>
-            </a:r>
-            <a:endParaRPr lang="en-US" sz="1400" dirty="0"/>
-          </a:p>
-        </p:txBody>
-      </p:sp>
-      <p:sp>
-        <p:nvSpPr>
-          <p:cNvPr id="37" name="Shape 35"/>
-          <p:cNvSpPr/>
-          <p:nvPr/>
-        </p:nvSpPr>
-        <p:spPr>
-          <a:xfrm>
-            <a:off x="365760" y="4096512"/>
-            <a:ext cx="1371600" cy="804672"/>
+              <a:t>m</a:t>
+            </a:r>
+            <a:endParaRPr lang="en-US" sz="900" dirty="0"/>
+          </a:p>
+        </p:txBody>
+      </p:sp>
+      <p:sp>
+        <p:nvSpPr>
+          <p:cNvPr id="39" name="Shape 37"/>
+          <p:cNvSpPr/>
+          <p:nvPr/>
+        </p:nvSpPr>
+        <p:spPr>
+          <a:xfrm>
+            <a:off x="3033522" y="4169664"/>
+            <a:ext cx="685800" cy="475488"/>
           </a:xfrm>
           <a:prstGeom prst="rect">
             <a:avLst>
-              <a:gd name="adj" fmla="val 6818"/>
+              <a:gd name="adj" fmla="val 7692"/>
             </a:avLst>
           </a:prstGeom>
           <a:solidFill>
-            <a:srgbClr val="E2E8F0"/>
-          </a:solidFill>
-          <a:ln w="12700">
-            <a:solidFill>
-              <a:srgbClr val="E2E8F0"/>
-            </a:solidFill>
-            <a:prstDash val="solid"/>
-          </a:ln>
-        </p:spPr>
-      </p:sp>
-      <p:sp>
-        <p:nvSpPr>
-          <p:cNvPr id="38" name="Text 36"/>
-          <p:cNvSpPr/>
-          <p:nvPr/>
-        </p:nvSpPr>
-        <p:spPr>
-          <a:xfrm>
-            <a:off x="365760" y="4096512"/>
-            <a:ext cx="1371600" cy="804672"/>
-          </a:xfrm>
-          <a:prstGeom prst="rect">
-            <a:avLst/>
-          </a:prstGeom>
-          <a:noFill/>
-          <a:ln/>
-        </p:spPr>
-        <p:txBody>
-          <a:bodyPr wrap="square" lIns="0" tIns="0" rIns="0" bIns="0" rtlCol="0" anchor="ctr"/>
-          <a:lstStyle/>
-          <a:p>
-            <a:pPr algn="ctr" indent="0" marL="0">
-              <a:buNone/>
-            </a:pPr>
-            <a:r>
-              <a:rPr lang="en-US" sz="1100" b="1" dirty="0">
-                <a:solidFill>
-                  <a:srgbClr val="475569"/>
+            <a:srgbClr val="FFFFFF"/>
+          </a:solidFill>
+          <a:ln w="12700">
+            <a:solidFill>
+              <a:srgbClr val="DB2777"/>
+            </a:solidFill>
+            <a:prstDash val="solid"/>
+          </a:ln>
+        </p:spPr>
+      </p:sp>
+      <p:sp>
+        <p:nvSpPr>
+          <p:cNvPr id="40" name="Text 38"/>
+          <p:cNvSpPr/>
+          <p:nvPr/>
+        </p:nvSpPr>
+        <p:spPr>
+          <a:xfrm>
+            <a:off x="3033522" y="4169664"/>
+            <a:ext cx="685800" cy="475488"/>
+          </a:xfrm>
+          <a:prstGeom prst="rect">
+            <a:avLst/>
+          </a:prstGeom>
+          <a:noFill/>
+          <a:ln/>
+        </p:spPr>
+        <p:txBody>
+          <a:bodyPr wrap="square" lIns="0" tIns="0" rIns="0" bIns="0" rtlCol="0" anchor="ctr"/>
+          <a:lstStyle/>
+          <a:p>
+            <a:pPr algn="ctr" indent="0" marL="0">
+              <a:buNone/>
+            </a:pPr>
+            <a:r>
+              <a:rPr lang="en-US" sz="900" b="1" dirty="0">
+                <a:solidFill>
+                  <a:srgbClr val="9D174D"/>
                 </a:solidFill>
                 <a:latin typeface="Trebuchet MS" pitchFamily="34" charset="0"/>
                 <a:ea typeface="Trebuchet MS" pitchFamily="34" charset="-122"/>
                 <a:cs typeface="Trebuchet MS" pitchFamily="34" charset="-120"/>
               </a:rPr>
-              <a:t>Phonemes</a:t>
-            </a:r>
-            <a:endParaRPr lang="en-US" sz="1100" dirty="0"/>
-          </a:p>
-        </p:txBody>
-      </p:sp>
-      <p:sp>
-        <p:nvSpPr>
-          <p:cNvPr id="39" name="Shape 37"/>
-          <p:cNvSpPr/>
-          <p:nvPr/>
-        </p:nvSpPr>
-        <p:spPr>
-          <a:xfrm>
-            <a:off x="1874520" y="4096512"/>
-            <a:ext cx="6903720" cy="804672"/>
+              <a:t>a</a:t>
+            </a:r>
+            <a:endParaRPr lang="en-US" sz="900" dirty="0"/>
+          </a:p>
+        </p:txBody>
+      </p:sp>
+      <p:sp>
+        <p:nvSpPr>
+          <p:cNvPr id="41" name="Shape 39"/>
+          <p:cNvSpPr/>
+          <p:nvPr/>
+        </p:nvSpPr>
+        <p:spPr>
+          <a:xfrm>
+            <a:off x="3942207" y="4169664"/>
+            <a:ext cx="685800" cy="475488"/>
           </a:xfrm>
           <a:prstGeom prst="rect">
             <a:avLst>
-              <a:gd name="adj" fmla="val 6818"/>
+              <a:gd name="adj" fmla="val 7692"/>
             </a:avLst>
           </a:prstGeom>
           <a:solidFill>
-            <a:srgbClr val="FCE7F3"/>
+            <a:srgbClr val="FFFFFF"/>
           </a:solidFill>
           <a:ln w="12700">
             <a:solidFill>
@@ -33235,41 +33829,14 @@
       </p:sp>
       <p:sp>
         <p:nvSpPr>
-          <p:cNvPr id="40" name="Shape 38"/>
-          <p:cNvSpPr/>
-          <p:nvPr/>
-        </p:nvSpPr>
-        <p:spPr>
-          <a:xfrm>
-            <a:off x="2124837" y="4169664"/>
-            <a:ext cx="685800" cy="384048"/>
-          </a:xfrm>
-          <a:prstGeom prst="rect">
-            <a:avLst>
-              <a:gd name="adj" fmla="val 9524"/>
-            </a:avLst>
-          </a:prstGeom>
-          <a:solidFill>
-            <a:srgbClr val="FFFFFF"/>
-          </a:solidFill>
-          <a:ln w="12700">
-            <a:solidFill>
-              <a:srgbClr val="DB2777"/>
-            </a:solidFill>
-            <a:prstDash val="solid"/>
-          </a:ln>
-        </p:spPr>
-      </p:sp>
-      <p:sp>
-        <p:nvSpPr>
-          <p:cNvPr id="41" name="Text 39"/>
-          <p:cNvSpPr/>
-          <p:nvPr/>
-        </p:nvSpPr>
-        <p:spPr>
-          <a:xfrm>
-            <a:off x="2124837" y="4169664"/>
-            <a:ext cx="685800" cy="384048"/>
+          <p:cNvPr id="42" name="Text 40"/>
+          <p:cNvSpPr/>
+          <p:nvPr/>
+        </p:nvSpPr>
+        <p:spPr>
+          <a:xfrm>
+            <a:off x="3942207" y="4169664"/>
+            <a:ext cx="685800" cy="475488"/>
           </a:xfrm>
           <a:prstGeom prst="rect">
             <a:avLst/>
@@ -33293,7 +33860,7 @@
                 <a:ea typeface="Trebuchet MS" pitchFamily="34" charset="-122"/>
                 <a:cs typeface="Trebuchet MS" pitchFamily="34" charset="-120"/>
               </a:rPr>
-              <a:t>m</a:t>
+              <a:t>n</a:t>
             </a:r>
             <a:endParaRPr lang="en-US" sz="900" dirty="0"/>
           </a:p>
@@ -33301,18 +33868,18 @@
       </p:sp>
       <p:sp>
         <p:nvSpPr>
-          <p:cNvPr id="42" name="Shape 40"/>
-          <p:cNvSpPr/>
-          <p:nvPr/>
-        </p:nvSpPr>
-        <p:spPr>
-          <a:xfrm>
-            <a:off x="3033522" y="4169664"/>
-            <a:ext cx="685800" cy="384048"/>
+          <p:cNvPr id="43" name="Shape 41"/>
+          <p:cNvSpPr/>
+          <p:nvPr/>
+        </p:nvSpPr>
+        <p:spPr>
+          <a:xfrm>
+            <a:off x="4850892" y="4169664"/>
+            <a:ext cx="685800" cy="475488"/>
           </a:xfrm>
           <a:prstGeom prst="rect">
             <a:avLst>
-              <a:gd name="adj" fmla="val 9524"/>
+              <a:gd name="adj" fmla="val 7692"/>
             </a:avLst>
           </a:prstGeom>
           <a:solidFill>
@@ -33328,14 +33895,14 @@
       </p:sp>
       <p:sp>
         <p:nvSpPr>
-          <p:cNvPr id="43" name="Text 41"/>
-          <p:cNvSpPr/>
-          <p:nvPr/>
-        </p:nvSpPr>
-        <p:spPr>
-          <a:xfrm>
-            <a:off x="3033522" y="4169664"/>
-            <a:ext cx="685800" cy="384048"/>
+          <p:cNvPr id="44" name="Text 42"/>
+          <p:cNvSpPr/>
+          <p:nvPr/>
+        </p:nvSpPr>
+        <p:spPr>
+          <a:xfrm>
+            <a:off x="4850892" y="4169664"/>
+            <a:ext cx="685800" cy="475488"/>
           </a:xfrm>
           <a:prstGeom prst="rect">
             <a:avLst/>
@@ -33359,7 +33926,7 @@
                 <a:ea typeface="Trebuchet MS" pitchFamily="34" charset="-122"/>
                 <a:cs typeface="Trebuchet MS" pitchFamily="34" charset="-120"/>
               </a:rPr>
-              <a:t>an</a:t>
+              <a:t>a</a:t>
             </a:r>
             <a:endParaRPr lang="en-US" sz="900" dirty="0"/>
           </a:p>
@@ -33367,18 +33934,18 @@
       </p:sp>
       <p:sp>
         <p:nvSpPr>
-          <p:cNvPr id="44" name="Shape 42"/>
-          <p:cNvSpPr/>
-          <p:nvPr/>
-        </p:nvSpPr>
-        <p:spPr>
-          <a:xfrm>
-            <a:off x="3942207" y="4169664"/>
-            <a:ext cx="685800" cy="384048"/>
+          <p:cNvPr id="45" name="Shape 43"/>
+          <p:cNvSpPr/>
+          <p:nvPr/>
+        </p:nvSpPr>
+        <p:spPr>
+          <a:xfrm>
+            <a:off x="5759577" y="4169664"/>
+            <a:ext cx="685800" cy="475488"/>
           </a:xfrm>
           <a:prstGeom prst="rect">
             <a:avLst>
-              <a:gd name="adj" fmla="val 9524"/>
+              <a:gd name="adj" fmla="val 7692"/>
             </a:avLst>
           </a:prstGeom>
           <a:solidFill>
@@ -33394,14 +33961,14 @@
       </p:sp>
       <p:sp>
         <p:nvSpPr>
-          <p:cNvPr id="45" name="Text 43"/>
-          <p:cNvSpPr/>
-          <p:nvPr/>
-        </p:nvSpPr>
-        <p:spPr>
-          <a:xfrm>
-            <a:off x="3942207" y="4169664"/>
-            <a:ext cx="685800" cy="384048"/>
+          <p:cNvPr id="46" name="Text 44"/>
+          <p:cNvSpPr/>
+          <p:nvPr/>
+        </p:nvSpPr>
+        <p:spPr>
+          <a:xfrm>
+            <a:off x="5759577" y="4169664"/>
+            <a:ext cx="685800" cy="475488"/>
           </a:xfrm>
           <a:prstGeom prst="rect">
             <a:avLst/>
@@ -33425,7 +33992,7 @@
                 <a:ea typeface="Trebuchet MS" pitchFamily="34" charset="-122"/>
                 <a:cs typeface="Trebuchet MS" pitchFamily="34" charset="-120"/>
               </a:rPr>
-              <a:t>a</a:t>
+              <a:t>g</a:t>
             </a:r>
             <a:endParaRPr lang="en-US" sz="900" dirty="0"/>
           </a:p>
@@ -33433,18 +34000,18 @@
       </p:sp>
       <p:sp>
         <p:nvSpPr>
-          <p:cNvPr id="46" name="Shape 44"/>
-          <p:cNvSpPr/>
-          <p:nvPr/>
-        </p:nvSpPr>
-        <p:spPr>
-          <a:xfrm>
-            <a:off x="4850892" y="4169664"/>
-            <a:ext cx="685800" cy="384048"/>
+          <p:cNvPr id="47" name="Shape 45"/>
+          <p:cNvSpPr/>
+          <p:nvPr/>
+        </p:nvSpPr>
+        <p:spPr>
+          <a:xfrm>
+            <a:off x="6668262" y="4169664"/>
+            <a:ext cx="685800" cy="475488"/>
           </a:xfrm>
           <a:prstGeom prst="rect">
             <a:avLst>
-              <a:gd name="adj" fmla="val 9524"/>
+              <a:gd name="adj" fmla="val 7692"/>
             </a:avLst>
           </a:prstGeom>
           <a:solidFill>
@@ -33460,14 +34027,14 @@
       </p:sp>
       <p:sp>
         <p:nvSpPr>
-          <p:cNvPr id="47" name="Text 45"/>
-          <p:cNvSpPr/>
-          <p:nvPr/>
-        </p:nvSpPr>
-        <p:spPr>
-          <a:xfrm>
-            <a:off x="4850892" y="4169664"/>
-            <a:ext cx="685800" cy="384048"/>
+          <p:cNvPr id="48" name="Text 46"/>
+          <p:cNvSpPr/>
+          <p:nvPr/>
+        </p:nvSpPr>
+        <p:spPr>
+          <a:xfrm>
+            <a:off x="6668262" y="4169664"/>
+            <a:ext cx="685800" cy="475488"/>
           </a:xfrm>
           <a:prstGeom prst="rect">
             <a:avLst/>
@@ -33491,7 +34058,7 @@
                 <a:ea typeface="Trebuchet MS" pitchFamily="34" charset="-122"/>
                 <a:cs typeface="Trebuchet MS" pitchFamily="34" charset="-120"/>
               </a:rPr>
-              <a:t>ge</a:t>
+              <a:t>i</a:t>
             </a:r>
             <a:endParaRPr lang="en-US" sz="900" dirty="0"/>
           </a:p>
@@ -33499,57 +34066,18 @@
       </p:sp>
       <p:sp>
         <p:nvSpPr>
-          <p:cNvPr id="48" name="Text 46"/>
-          <p:cNvSpPr/>
-          <p:nvPr/>
-        </p:nvSpPr>
-        <p:spPr>
-          <a:xfrm>
-            <a:off x="4850892" y="4572000"/>
-            <a:ext cx="685800" cy="219456"/>
-          </a:xfrm>
-          <a:prstGeom prst="rect">
-            <a:avLst/>
-          </a:prstGeom>
-          <a:noFill/>
-          <a:ln/>
-        </p:spPr>
-        <p:txBody>
-          <a:bodyPr wrap="square" lIns="0" tIns="0" rIns="0" bIns="0" rtlCol="0" anchor="t"/>
-          <a:lstStyle/>
-          <a:p>
-            <a:pPr algn="ctr" indent="0" marL="0">
-              <a:buNone/>
-            </a:pPr>
-            <a:r>
-              <a:rPr lang="en-US" sz="750" i="1" dirty="0">
-                <a:solidFill>
-                  <a:srgbClr val="94A3B8"/>
-                </a:solidFill>
-                <a:latin typeface="Calibri" pitchFamily="34" charset="0"/>
-                <a:ea typeface="Calibri" pitchFamily="34" charset="-122"/>
-                <a:cs typeface="Calibri" pitchFamily="34" charset="-120"/>
-              </a:rPr>
-              <a:t>/j/</a:t>
-            </a:r>
-            <a:endParaRPr lang="en-US" sz="750" dirty="0"/>
-          </a:p>
-        </p:txBody>
-      </p:sp>
-      <p:sp>
-        <p:nvSpPr>
           <p:cNvPr id="49" name="Shape 47"/>
           <p:cNvSpPr/>
           <p:nvPr/>
         </p:nvSpPr>
         <p:spPr>
           <a:xfrm>
-            <a:off x="5759577" y="4169664"/>
-            <a:ext cx="685800" cy="384048"/>
+            <a:off x="7576947" y="4169664"/>
+            <a:ext cx="685800" cy="475488"/>
           </a:xfrm>
           <a:prstGeom prst="rect">
             <a:avLst>
-              <a:gd name="adj" fmla="val 9524"/>
+              <a:gd name="adj" fmla="val 7692"/>
             </a:avLst>
           </a:prstGeom>
           <a:solidFill>
@@ -33571,8 +34099,8 @@
         </p:nvSpPr>
         <p:spPr>
           <a:xfrm>
-            <a:off x="5759577" y="4169664"/>
-            <a:ext cx="685800" cy="384048"/>
+            <a:off x="7576947" y="4169664"/>
+            <a:ext cx="685800" cy="475488"/>
           </a:xfrm>
           <a:prstGeom prst="rect">
             <a:avLst/>
@@ -33596,139 +34124,7 @@
                 <a:ea typeface="Trebuchet MS" pitchFamily="34" charset="-122"/>
                 <a:cs typeface="Trebuchet MS" pitchFamily="34" charset="-120"/>
               </a:rPr>
-              <a:t>a</a:t>
-            </a:r>
-            <a:endParaRPr lang="en-US" sz="900" dirty="0"/>
-          </a:p>
-        </p:txBody>
-      </p:sp>
-      <p:sp>
-        <p:nvSpPr>
-          <p:cNvPr id="51" name="Shape 49"/>
-          <p:cNvSpPr/>
-          <p:nvPr/>
-        </p:nvSpPr>
-        <p:spPr>
-          <a:xfrm>
-            <a:off x="6668262" y="4169664"/>
-            <a:ext cx="685800" cy="384048"/>
-          </a:xfrm>
-          <a:prstGeom prst="rect">
-            <a:avLst>
-              <a:gd name="adj" fmla="val 9524"/>
-            </a:avLst>
-          </a:prstGeom>
-          <a:solidFill>
-            <a:srgbClr val="FFFFFF"/>
-          </a:solidFill>
-          <a:ln w="12700">
-            <a:solidFill>
-              <a:srgbClr val="DB2777"/>
-            </a:solidFill>
-            <a:prstDash val="solid"/>
-          </a:ln>
-        </p:spPr>
-      </p:sp>
-      <p:sp>
-        <p:nvSpPr>
-          <p:cNvPr id="52" name="Text 50"/>
-          <p:cNvSpPr/>
-          <p:nvPr/>
-        </p:nvSpPr>
-        <p:spPr>
-          <a:xfrm>
-            <a:off x="6668262" y="4169664"/>
-            <a:ext cx="685800" cy="384048"/>
-          </a:xfrm>
-          <a:prstGeom prst="rect">
-            <a:avLst/>
-          </a:prstGeom>
-          <a:noFill/>
-          <a:ln/>
-        </p:spPr>
-        <p:txBody>
-          <a:bodyPr wrap="square" lIns="0" tIns="0" rIns="0" bIns="0" rtlCol="0" anchor="ctr"/>
-          <a:lstStyle/>
-          <a:p>
-            <a:pPr algn="ctr" indent="0" marL="0">
-              <a:buNone/>
-            </a:pPr>
-            <a:r>
-              <a:rPr lang="en-US" sz="900" b="1" dirty="0">
-                <a:solidFill>
-                  <a:srgbClr val="9D174D"/>
-                </a:solidFill>
-                <a:latin typeface="Trebuchet MS" pitchFamily="34" charset="0"/>
-                <a:ea typeface="Trebuchet MS" pitchFamily="34" charset="-122"/>
-                <a:cs typeface="Trebuchet MS" pitchFamily="34" charset="-120"/>
-              </a:rPr>
-              <a:t>b</a:t>
-            </a:r>
-            <a:endParaRPr lang="en-US" sz="900" dirty="0"/>
-          </a:p>
-        </p:txBody>
-      </p:sp>
-      <p:sp>
-        <p:nvSpPr>
-          <p:cNvPr id="53" name="Shape 51"/>
-          <p:cNvSpPr/>
-          <p:nvPr/>
-        </p:nvSpPr>
-        <p:spPr>
-          <a:xfrm>
-            <a:off x="7576947" y="4169664"/>
-            <a:ext cx="685800" cy="384048"/>
-          </a:xfrm>
-          <a:prstGeom prst="rect">
-            <a:avLst>
-              <a:gd name="adj" fmla="val 9524"/>
-            </a:avLst>
-          </a:prstGeom>
-          <a:solidFill>
-            <a:srgbClr val="FFFFFF"/>
-          </a:solidFill>
-          <a:ln w="12700">
-            <a:solidFill>
-              <a:srgbClr val="DB2777"/>
-            </a:solidFill>
-            <a:prstDash val="solid"/>
-          </a:ln>
-        </p:spPr>
-      </p:sp>
-      <p:sp>
-        <p:nvSpPr>
-          <p:cNvPr id="54" name="Text 52"/>
-          <p:cNvSpPr/>
-          <p:nvPr/>
-        </p:nvSpPr>
-        <p:spPr>
-          <a:xfrm>
-            <a:off x="7576947" y="4169664"/>
-            <a:ext cx="685800" cy="384048"/>
-          </a:xfrm>
-          <a:prstGeom prst="rect">
-            <a:avLst/>
-          </a:prstGeom>
-          <a:noFill/>
-          <a:ln/>
-        </p:spPr>
-        <p:txBody>
-          <a:bodyPr wrap="square" lIns="0" tIns="0" rIns="0" bIns="0" rtlCol="0" anchor="ctr"/>
-          <a:lstStyle/>
-          <a:p>
-            <a:pPr algn="ctr" indent="0" marL="0">
-              <a:buNone/>
-            </a:pPr>
-            <a:r>
-              <a:rPr lang="en-US" sz="900" b="1" dirty="0">
-                <a:solidFill>
-                  <a:srgbClr val="9D174D"/>
-                </a:solidFill>
-                <a:latin typeface="Trebuchet MS" pitchFamily="34" charset="0"/>
-                <a:ea typeface="Trebuchet MS" pitchFamily="34" charset="-122"/>
-                <a:cs typeface="Trebuchet MS" pitchFamily="34" charset="-120"/>
-              </a:rPr>
-              <a:t>le</a:t>
+              <a:t>ng</a:t>
             </a:r>
             <a:endParaRPr lang="en-US" sz="900" dirty="0"/>
           </a:p>
@@ -34020,7 +34416,7 @@
                 <a:ea typeface="Calibri" pitchFamily="34" charset="-122"/>
                 <a:cs typeface="Calibri" pitchFamily="34" charset="-120"/>
               </a:rPr>
-              <a:t>Word Labs  •  wordlabs.app  •  Root: 'manage' = control, handle, or direct</a:t>
+              <a:t>Word Labs  •  wordlabs.app  •  Root: 'manage' = handle, control, direct</a:t>
             </a:r>
             <a:endParaRPr lang="en-US" sz="800" dirty="0"/>
           </a:p>
@@ -35189,7 +35585,7 @@
                 <a:ea typeface="Calibri" pitchFamily="34" charset="-122"/>
                 <a:cs typeface="Calibri" pitchFamily="34" charset="-120"/>
               </a:rPr>
-              <a:t>Word Labs  •  wordlabs.app  •  Root: 'manage' = control, handle, or direct</a:t>
+              <a:t>Word Labs  •  wordlabs.app  •  Root: 'manage' = handle, control, direct</a:t>
             </a:r>
             <a:endParaRPr lang="en-US" sz="800" dirty="0"/>
           </a:p>
@@ -35682,7 +36078,7 @@
                 <a:ea typeface="Trebuchet MS" pitchFamily="34" charset="-122"/>
                 <a:cs typeface="Trebuchet MS" pitchFamily="34" charset="-120"/>
               </a:rPr>
-              <a:t>co-</a:t>
+              <a:t>re-</a:t>
             </a:r>
             <a:endParaRPr lang="en-US" sz="1300" dirty="0"/>
           </a:p>
@@ -35835,7 +36231,7 @@
                 <a:ea typeface="Trebuchet MS" pitchFamily="34" charset="-122"/>
                 <a:cs typeface="Trebuchet MS" pitchFamily="34" charset="-120"/>
               </a:rPr>
-              <a:t>over-</a:t>
+              <a:t>co-</a:t>
             </a:r>
             <a:endParaRPr lang="en-US" sz="1300" dirty="0"/>
           </a:p>
@@ -35988,7 +36384,7 @@
                 <a:ea typeface="Trebuchet MS" pitchFamily="34" charset="-122"/>
                 <a:cs typeface="Trebuchet MS" pitchFamily="34" charset="-120"/>
               </a:rPr>
-              <a:t>under-</a:t>
+              <a:t>over-</a:t>
             </a:r>
             <a:endParaRPr lang="en-US" sz="1300" dirty="0"/>
           </a:p>
@@ -36141,7 +36537,7 @@
                 <a:ea typeface="Trebuchet MS" pitchFamily="34" charset="-122"/>
                 <a:cs typeface="Trebuchet MS" pitchFamily="34" charset="-120"/>
               </a:rPr>
-              <a:t>self-</a:t>
+              <a:t>under-</a:t>
             </a:r>
             <a:endParaRPr lang="en-US" sz="1300" dirty="0"/>
           </a:p>
@@ -37089,7 +37485,7 @@
                 <a:ea typeface="Calibri" pitchFamily="34" charset="-122"/>
                 <a:cs typeface="Calibri" pitchFamily="34" charset="-120"/>
               </a:rPr>
-              <a:t>Word Labs  •  wordlabs.app  •  Root: 'manage' = control, handle, or direct</a:t>
+              <a:t>Word Labs  •  wordlabs.app  •  Root: 'manage' = handle, control, direct</a:t>
             </a:r>
             <a:endParaRPr lang="en-US" sz="800" dirty="0"/>
           </a:p>
@@ -37253,7 +37649,7 @@
                 <a:ea typeface="Calibri" pitchFamily="34" charset="-122"/>
                 <a:cs typeface="Calibri" pitchFamily="34" charset="-120"/>
               </a:rPr>
-              <a:t>The core part of a word carrying its basic meaning. For example, 'manage' means 'control, handle, or direct'.</a:t>
+              <a:t>The core part of a word carrying its basic meaning. For example, 'manage' means 'handle, control, direct'.</a:t>
             </a:r>
             <a:endParaRPr lang="en-US" sz="1350" dirty="0"/>
           </a:p>
@@ -37873,7 +38269,7 @@
                 <a:ea typeface="Calibri" pitchFamily="34" charset="-122"/>
                 <a:cs typeface="Calibri" pitchFamily="34" charset="-120"/>
               </a:rPr>
-              <a:t>Word Labs  •  wordlabs.app  •  Root: 'manage' = control, handle, or direct</a:t>
+              <a:t>Word Labs  •  wordlabs.app  •  Root: 'manage' = handle, control, direct</a:t>
             </a:r>
             <a:endParaRPr lang="en-US" sz="800" dirty="0"/>
           </a:p>
@@ -37985,7 +38381,7 @@
                 <a:ea typeface="Calibri" pitchFamily="34" charset="-122"/>
                 <a:cs typeface="Calibri" pitchFamily="34" charset="-120"/>
               </a:rPr>
-              <a:t>1.  The word 'manage' comes from the Latin word 'manus', meaning hand.</a:t>
+              <a:t>1.  'Unmanageable' means something is very easy to control.</a:t>
             </a:r>
             <a:endParaRPr lang="en-US" sz="1300" dirty="0"/>
           </a:p>
@@ -38008,11 +38404,11 @@
             </a:avLst>
           </a:prstGeom>
           <a:solidFill>
-            <a:srgbClr val="DCFCE7"/>
-          </a:solidFill>
-          <a:ln w="12700">
-            <a:solidFill>
-              <a:srgbClr val="16A34A"/>
+            <a:srgbClr val="FEE2E2"/>
+          </a:solidFill>
+          <a:ln w="12700">
+            <a:solidFill>
+              <a:srgbClr val="DC2626"/>
             </a:solidFill>
             <a:prstDash val="solid"/>
           </a:ln>
@@ -38045,13 +38441,13 @@
             <a:r>
               <a:rPr lang="en-US" sz="1100" b="1" dirty="0">
                 <a:solidFill>
-                  <a:srgbClr val="16A34A"/>
+                  <a:srgbClr val="DC2626"/>
                 </a:solidFill>
                 <a:latin typeface="Trebuchet MS" pitchFamily="34" charset="0"/>
                 <a:ea typeface="Trebuchet MS" pitchFamily="34" charset="-122"/>
                 <a:cs typeface="Trebuchet MS" pitchFamily="34" charset="-120"/>
               </a:rPr>
-              <a:t>TRUE</a:t>
+              <a:t>FALSE</a:t>
             </a:r>
             <a:endParaRPr lang="en-US" sz="1100" dirty="0"/>
           </a:p>
@@ -38124,7 +38520,7 @@
                 <a:ea typeface="Calibri" pitchFamily="34" charset="-122"/>
                 <a:cs typeface="Calibri" pitchFamily="34" charset="-120"/>
               </a:rPr>
-              <a:t>2.  A 'manager' is someone who follows instructions from everyone else.</a:t>
+              <a:t>2.  The root 'manage' comes from a Greek word meaning 'to write'.</a:t>
             </a:r>
             <a:endParaRPr lang="en-US" sz="1300" dirty="0"/>
           </a:p>
@@ -38263,7 +38659,7 @@
                 <a:ea typeface="Calibri" pitchFamily="34" charset="-122"/>
                 <a:cs typeface="Calibri" pitchFamily="34" charset="-120"/>
               </a:rPr>
-              <a:t>3.  The suffix '-ment' in 'management' turns a verb into a noun.</a:t>
+              <a:t>3.  'Management' contains the root 'manage' plus the suffix '-ment'.</a:t>
             </a:r>
             <a:endParaRPr lang="en-US" sz="1300" dirty="0"/>
           </a:p>
@@ -38402,7 +38798,7 @@
                 <a:ea typeface="Calibri" pitchFamily="34" charset="-122"/>
                 <a:cs typeface="Calibri" pitchFamily="34" charset="-120"/>
               </a:rPr>
-              <a:t>4.  Something described as 'manageable' is easy enough to deal with.</a:t>
+              <a:t>4.  The word 'manager' contains the root 'manage' and the suffix '-er'.</a:t>
             </a:r>
             <a:endParaRPr lang="en-US" sz="1300" dirty="0"/>
           </a:p>
@@ -38541,7 +38937,7 @@
                 <a:ea typeface="Calibri" pitchFamily="34" charset="-122"/>
                 <a:cs typeface="Calibri" pitchFamily="34" charset="-120"/>
               </a:rPr>
-              <a:t>5.  The prefix 'mis-' in 'mismanage' means to do something very well.</a:t>
+              <a:t>5.  Adding the prefix 'mis-' to 'manage' creates a word meaning to handle something badly.</a:t>
             </a:r>
             <a:endParaRPr lang="en-US" sz="1300" dirty="0"/>
           </a:p>
@@ -38564,11 +38960,11 @@
             </a:avLst>
           </a:prstGeom>
           <a:solidFill>
-            <a:srgbClr val="FEE2E2"/>
-          </a:solidFill>
-          <a:ln w="12700">
-            <a:solidFill>
-              <a:srgbClr val="DC2626"/>
+            <a:srgbClr val="DCFCE7"/>
+          </a:solidFill>
+          <a:ln w="12700">
+            <a:solidFill>
+              <a:srgbClr val="16A34A"/>
             </a:solidFill>
             <a:prstDash val="solid"/>
           </a:ln>
@@ -38601,13 +38997,13 @@
             <a:r>
               <a:rPr lang="en-US" sz="1100" b="1" dirty="0">
                 <a:solidFill>
-                  <a:srgbClr val="DC2626"/>
+                  <a:srgbClr val="16A34A"/>
                 </a:solidFill>
                 <a:latin typeface="Trebuchet MS" pitchFamily="34" charset="0"/>
                 <a:ea typeface="Trebuchet MS" pitchFamily="34" charset="-122"/>
                 <a:cs typeface="Trebuchet MS" pitchFamily="34" charset="-120"/>
               </a:rPr>
-              <a:t>FALSE</a:t>
+              <a:t>TRUE</a:t>
             </a:r>
             <a:endParaRPr lang="en-US" sz="1100" dirty="0"/>
           </a:p>
@@ -38899,7 +39295,7 @@
                 <a:ea typeface="Calibri" pitchFamily="34" charset="-122"/>
                 <a:cs typeface="Calibri" pitchFamily="34" charset="-120"/>
               </a:rPr>
-              <a:t>Word Labs  •  wordlabs.app  •  Root: 'manage' = control, handle, or direct</a:t>
+              <a:t>Word Labs  •  wordlabs.app  •  Root: 'manage' = handle, control, direct</a:t>
             </a:r>
             <a:endParaRPr lang="en-US" sz="800" dirty="0"/>
           </a:p>
@@ -39036,7 +39432,7 @@
                 <a:ea typeface="Trebuchet MS" pitchFamily="34" charset="-122"/>
                 <a:cs typeface="Trebuchet MS" pitchFamily="34" charset="-120"/>
               </a:rPr>
-              <a:t>control, handle, or direct</a:t>
+              <a:t>handle, control, direct</a:t>
             </a:r>
             <a:endParaRPr lang="en-US" sz="2000" dirty="0"/>
           </a:p>
@@ -39868,7 +40264,7 @@
                 <a:ea typeface="Calibri" pitchFamily="34" charset="-122"/>
                 <a:cs typeface="Calibri" pitchFamily="34" charset="-120"/>
               </a:rPr>
-              <a:t>Word Labs  •  wordlabs.app  •  Root: 'manage' = control, handle, or direct</a:t>
+              <a:t>Word Labs  •  wordlabs.app  •  Root: 'manage' = handle, control, direct</a:t>
             </a:r>
             <a:endParaRPr lang="en-US" sz="800" dirty="0"/>
           </a:p>
@@ -40361,7 +40757,7 @@
                 <a:ea typeface="Trebuchet MS" pitchFamily="34" charset="-122"/>
                 <a:cs typeface="Trebuchet MS" pitchFamily="34" charset="-120"/>
               </a:rPr>
-              <a:t>co-</a:t>
+              <a:t>re-</a:t>
             </a:r>
             <a:endParaRPr lang="en-US" sz="1300" dirty="0"/>
           </a:p>
@@ -40514,7 +40910,7 @@
                 <a:ea typeface="Trebuchet MS" pitchFamily="34" charset="-122"/>
                 <a:cs typeface="Trebuchet MS" pitchFamily="34" charset="-120"/>
               </a:rPr>
-              <a:t>over-</a:t>
+              <a:t>co-</a:t>
             </a:r>
             <a:endParaRPr lang="en-US" sz="1300" dirty="0"/>
           </a:p>
@@ -40667,7 +41063,7 @@
                 <a:ea typeface="Trebuchet MS" pitchFamily="34" charset="-122"/>
                 <a:cs typeface="Trebuchet MS" pitchFamily="34" charset="-120"/>
               </a:rPr>
-              <a:t>under-</a:t>
+              <a:t>over-</a:t>
             </a:r>
             <a:endParaRPr lang="en-US" sz="1300" dirty="0"/>
           </a:p>
@@ -40820,7 +41216,7 @@
                 <a:ea typeface="Trebuchet MS" pitchFamily="34" charset="-122"/>
                 <a:cs typeface="Trebuchet MS" pitchFamily="34" charset="-120"/>
               </a:rPr>
-              <a:t>self-</a:t>
+              <a:t>under-</a:t>
             </a:r>
             <a:endParaRPr lang="en-US" sz="1300" dirty="0"/>
           </a:p>
@@ -41642,7 +42038,7 @@
                 <a:ea typeface="Calibri" pitchFamily="34" charset="-122"/>
                 <a:cs typeface="Calibri" pitchFamily="34" charset="-120"/>
               </a:rPr>
-              <a:t>Word Labs  •  wordlabs.app  •  Root: 'manage' = control, handle, or direct</a:t>
+              <a:t>Word Labs  •  wordlabs.app  •  Root: 'manage' = handle, control, direct</a:t>
             </a:r>
             <a:endParaRPr lang="en-US" sz="800" dirty="0"/>
           </a:p>
@@ -41959,7 +42355,7 @@
                 <a:ea typeface="Calibri" pitchFamily="34" charset="-122"/>
                 <a:cs typeface="Calibri" pitchFamily="34" charset="-120"/>
               </a:rPr>
-              <a:t>Something that is easy enough to handle or deal with.</a:t>
+              <a:t>Easy enough to deal with or handle without too much trouble.</a:t>
             </a:r>
             <a:endParaRPr lang="en-US" sz="1200" dirty="0"/>
           </a:p>
@@ -42098,7 +42494,7 @@
                 <a:ea typeface="Calibri" pitchFamily="34" charset="-122"/>
                 <a:cs typeface="Calibri" pitchFamily="34" charset="-120"/>
               </a:rPr>
-              <a:t>Currently being in charge of or dealing with something.</a:t>
+              <a:t>Being in charge of and looking after something right now.</a:t>
             </a:r>
             <a:endParaRPr lang="en-US" sz="1200" dirty="0"/>
           </a:p>
@@ -42237,7 +42633,7 @@
                 <a:ea typeface="Calibri" pitchFamily="34" charset="-122"/>
                 <a:cs typeface="Calibri" pitchFamily="34" charset="-120"/>
               </a:rPr>
-              <a:t>The act of being in charge of and organising something.</a:t>
+              <a:t>The skill or job of being in charge of and organising something.</a:t>
             </a:r>
             <a:endParaRPr lang="en-US" sz="1200" dirty="0"/>
           </a:p>
@@ -42376,7 +42772,7 @@
                 <a:ea typeface="Calibri" pitchFamily="34" charset="-122"/>
                 <a:cs typeface="Calibri" pitchFamily="34" charset="-120"/>
               </a:rPr>
-              <a:t>To handle something badly or make poor decisions about it.</a:t>
+              <a:t>To handle or run something badly so that things go wrong.</a:t>
             </a:r>
             <a:endParaRPr lang="en-US" sz="1200" dirty="0"/>
           </a:p>
@@ -42515,7 +42911,7 @@
                 <a:ea typeface="Calibri" pitchFamily="34" charset="-122"/>
                 <a:cs typeface="Calibri" pitchFamily="34" charset="-120"/>
               </a:rPr>
-              <a:t>To be in charge of something and make it work well.</a:t>
+              <a:t>To be in charge of something and make sure it runs well.</a:t>
             </a:r>
             <a:endParaRPr lang="en-US" sz="1200" dirty="0"/>
           </a:p>
@@ -42654,7 +43050,7 @@
                 <a:ea typeface="Calibri" pitchFamily="34" charset="-122"/>
                 <a:cs typeface="Calibri" pitchFamily="34" charset="-120"/>
               </a:rPr>
-              <a:t>A person who is in charge of a team, shop, or organisation.</a:t>
+              <a:t>A person who is in charge of a team, shop, or group of people.</a:t>
             </a:r>
             <a:endParaRPr lang="en-US" sz="1200" dirty="0"/>
           </a:p>
@@ -42946,7 +43342,7 @@
                 <a:ea typeface="Calibri" pitchFamily="34" charset="-122"/>
                 <a:cs typeface="Calibri" pitchFamily="34" charset="-120"/>
               </a:rPr>
-              <a:t>Word Labs  •  wordlabs.app  •  Root: 'manage' = control, handle, or direct</a:t>
+              <a:t>Word Labs  •  wordlabs.app  •  Root: 'manage' = handle, control, direct</a:t>
             </a:r>
             <a:endParaRPr lang="en-US" sz="800" dirty="0"/>
           </a:p>
@@ -43149,7 +43545,7 @@
                 <a:ea typeface="Calibri" pitchFamily="34" charset="-122"/>
                 <a:cs typeface="Calibri" pitchFamily="34" charset="-120"/>
               </a:rPr>
-              <a:t>The school captain had to manage the assembly while the principal was away.</a:t>
+              <a:t>The school captain had to manage the whole assembly on her own, which was quite a challenge.</a:t>
             </a:r>
             <a:endParaRPr lang="en-US" sz="1500" dirty="0"/>
           </a:p>
@@ -43313,7 +43709,7 @@
                 <a:ea typeface="Calibri" pitchFamily="34" charset="-122"/>
                 <a:cs typeface="Calibri" pitchFamily="34" charset="-120"/>
               </a:rPr>
-              <a:t>Our teacher said that breaking the project into smaller parts would make it more manageable.</a:t>
+              <a:t>Our teacher said that good time management helps us finish our work before the bell rings.</a:t>
             </a:r>
             <a:endParaRPr lang="en-US" sz="1500" dirty="0"/>
           </a:p>
@@ -43477,7 +43873,7 @@
                 <a:ea typeface="Calibri" pitchFamily="34" charset="-122"/>
                 <a:cs typeface="Calibri" pitchFamily="34" charset="-120"/>
               </a:rPr>
-              <a:t>The mismanagement of the school canteen meant that many students missed out on lunch.</a:t>
+              <a:t>The puppy was so excited at the park that it became completely unmanageable!</a:t>
             </a:r>
             <a:endParaRPr lang="en-US" sz="1500" dirty="0"/>
           </a:p>
